--- a/food-ppt/examples/polyphenols-antimicrobial-review.pptx
+++ b/food-ppt/examples/polyphenols-antimicrobial-review.pptx
@@ -4149,14 +4149,146 @@
       <p:grpSpPr/>
       <p:sp>
         <p:nvSpPr>
-          <p:cNvPr id="2" name="TextBox 1"/>
+          <p:cNvPr id="2" name="Rectangle 1"/>
+          <p:cNvSpPr/>
+          <p:nvPr/>
+        </p:nvSpPr>
+        <p:spPr>
+          <a:xfrm>
+            <a:off x="0" y="0"/>
+            <a:ext cx="12191695" cy="6858000"/>
+          </a:xfrm>
+          <a:prstGeom prst="rect">
+            <a:avLst/>
+          </a:prstGeom>
+          <a:solidFill>
+            <a:srgbClr val="FFFFFF"/>
+          </a:solidFill>
+          <a:ln>
+            <a:noFill/>
+          </a:ln>
+          <a:effectLst/>
+        </p:spPr>
+        <p:style>
+          <a:lnRef idx="1">
+            <a:schemeClr val="accent1"/>
+          </a:lnRef>
+          <a:fillRef idx="3">
+            <a:schemeClr val="accent1"/>
+          </a:fillRef>
+          <a:effectRef idx="2">
+            <a:schemeClr val="accent1"/>
+          </a:effectRef>
+          <a:fontRef idx="minor">
+            <a:schemeClr val="lt1"/>
+          </a:fontRef>
+        </p:style>
+        <p:txBody>
+          <a:bodyPr rtlCol="0" anchor="ctr"/>
+          <a:lstStyle/>
+          <a:p>
+            <a:pPr algn="ctr"/>
+          </a:p>
+        </p:txBody>
+      </p:sp>
+      <p:sp>
+        <p:nvSpPr>
+          <p:cNvPr id="3" name="Rectangle 2"/>
+          <p:cNvSpPr/>
+          <p:nvPr/>
+        </p:nvSpPr>
+        <p:spPr>
+          <a:xfrm>
+            <a:off x="0" y="0"/>
+            <a:ext cx="12191695" cy="256032"/>
+          </a:xfrm>
+          <a:prstGeom prst="rect">
+            <a:avLst/>
+          </a:prstGeom>
+          <a:solidFill>
+            <a:srgbClr val="3B5A40"/>
+          </a:solidFill>
+          <a:ln>
+            <a:noFill/>
+          </a:ln>
+          <a:effectLst/>
+        </p:spPr>
+        <p:style>
+          <a:lnRef idx="1">
+            <a:schemeClr val="accent1"/>
+          </a:lnRef>
+          <a:fillRef idx="3">
+            <a:schemeClr val="accent1"/>
+          </a:fillRef>
+          <a:effectRef idx="2">
+            <a:schemeClr val="accent1"/>
+          </a:effectRef>
+          <a:fontRef idx="minor">
+            <a:schemeClr val="lt1"/>
+          </a:fontRef>
+        </p:style>
+        <p:txBody>
+          <a:bodyPr rtlCol="0" anchor="ctr"/>
+          <a:lstStyle/>
+          <a:p>
+            <a:pPr algn="ctr"/>
+          </a:p>
+        </p:txBody>
+      </p:sp>
+      <p:sp>
+        <p:nvSpPr>
+          <p:cNvPr id="4" name="Rectangle 3"/>
+          <p:cNvSpPr/>
+          <p:nvPr/>
+        </p:nvSpPr>
+        <p:spPr>
+          <a:xfrm>
+            <a:off x="0" y="6309360"/>
+            <a:ext cx="12191695" cy="548640"/>
+          </a:xfrm>
+          <a:prstGeom prst="rect">
+            <a:avLst/>
+          </a:prstGeom>
+          <a:solidFill>
+            <a:srgbClr val="EEF1EC"/>
+          </a:solidFill>
+          <a:ln>
+            <a:noFill/>
+          </a:ln>
+          <a:effectLst/>
+        </p:spPr>
+        <p:style>
+          <a:lnRef idx="1">
+            <a:schemeClr val="accent1"/>
+          </a:lnRef>
+          <a:fillRef idx="3">
+            <a:schemeClr val="accent1"/>
+          </a:fillRef>
+          <a:effectRef idx="2">
+            <a:schemeClr val="accent1"/>
+          </a:effectRef>
+          <a:fontRef idx="minor">
+            <a:schemeClr val="lt1"/>
+          </a:fontRef>
+        </p:style>
+        <p:txBody>
+          <a:bodyPr rtlCol="0" anchor="ctr"/>
+          <a:lstStyle/>
+          <a:p>
+            <a:pPr algn="ctr"/>
+          </a:p>
+        </p:txBody>
+      </p:sp>
+      <p:sp>
+        <p:nvSpPr>
+          <p:cNvPr id="5" name="TextBox 4"/>
           <p:cNvSpPr txBox="1"/>
           <p:nvPr/>
         </p:nvSpPr>
         <p:spPr>
           <a:xfrm>
-            <a:off x="731520" y="2194560"/>
-            <a:ext cx="10698480" cy="1828800"/>
+            <a:off x="822960" y="2057400"/>
+            <a:ext cx="10515600" cy="2377440"/>
           </a:xfrm>
           <a:prstGeom prst="rect">
             <a:avLst/>
@@ -4169,48 +4301,112 @@
           </a:bodyPr>
           <a:lstStyle/>
           <a:p>
-            <a:pPr/>
+            <a:pPr>
+              <a:spcAft>
+                <a:spcPts val="1000"/>
+              </a:spcAft>
+            </a:pPr>
             <a:r>
               <a:rPr sz="4000" b="1">
                 <a:solidFill>
-                  <a:srgbClr val="2F5D62"/>
+                  <a:srgbClr val="3B5A40"/>
                 </a:solidFill>
+                <a:latin typeface="Georgia"/>
               </a:rPr>
               <a:t>Antimicrobial Potential of Polyphenols</a:t>
             </a:r>
           </a:p>
           <a:p>
-            <a:pPr/>
+            <a:pPr>
+              <a:spcAft>
+                <a:spcPts val="400"/>
+              </a:spcAft>
+            </a:pPr>
             <a:r>
               <a:rPr sz="2000" b="0">
                 <a:solidFill>
-                  <a:srgbClr val="555555"/>
+                  <a:srgbClr val="20261F"/>
                 </a:solidFill>
+                <a:latin typeface="Calibri"/>
               </a:rPr>
               <a:t>Mechanisms of action and microbial responses — a narrative review</a:t>
             </a:r>
           </a:p>
           <a:p>
-            <a:pPr/>
-            <a:r>
-              <a:rPr sz="2000" b="0">
+            <a:pPr>
+              <a:spcAft>
+                <a:spcPts val="400"/>
+              </a:spcAft>
+            </a:pPr>
+            <a:r>
+              <a:rPr sz="1600" b="0">
                 <a:solidFill>
-                  <a:srgbClr val="555555"/>
+                  <a:srgbClr val="5C6357"/>
                 </a:solidFill>
+                <a:latin typeface="Calibri"/>
               </a:rPr>
               <a:t>Rossi, Rocchetti, Lucini &amp; Rebecchi (2025) · Antioxidants 14(2):200 · CC-BY</a:t>
             </a:r>
           </a:p>
           <a:p>
-            <a:pPr/>
-            <a:r>
-              <a:rPr sz="2000" b="0">
+            <a:pPr>
+              <a:spcAft>
+                <a:spcPts val="400"/>
+              </a:spcAft>
+            </a:pPr>
+            <a:r>
+              <a:rPr sz="1300" b="0">
                 <a:solidFill>
-                  <a:srgbClr val="555555"/>
+                  <a:srgbClr val="5C6357"/>
                 </a:solidFill>
+                <a:latin typeface="Calibri"/>
               </a:rPr>
               <a:t>Journal-club deck (example)</a:t>
             </a:r>
+          </a:p>
+        </p:txBody>
+      </p:sp>
+      <p:sp>
+        <p:nvSpPr>
+          <p:cNvPr id="6" name="Rectangle 5"/>
+          <p:cNvSpPr/>
+          <p:nvPr/>
+        </p:nvSpPr>
+        <p:spPr>
+          <a:xfrm>
+            <a:off x="868680" y="3200400"/>
+            <a:ext cx="2926080" cy="38100"/>
+          </a:xfrm>
+          <a:prstGeom prst="rect">
+            <a:avLst/>
+          </a:prstGeom>
+          <a:solidFill>
+            <a:srgbClr val="7D9D74"/>
+          </a:solidFill>
+          <a:ln>
+            <a:noFill/>
+          </a:ln>
+          <a:effectLst/>
+        </p:spPr>
+        <p:style>
+          <a:lnRef idx="1">
+            <a:schemeClr val="accent1"/>
+          </a:lnRef>
+          <a:fillRef idx="3">
+            <a:schemeClr val="accent1"/>
+          </a:fillRef>
+          <a:effectRef idx="2">
+            <a:schemeClr val="accent1"/>
+          </a:effectRef>
+          <a:fontRef idx="minor">
+            <a:schemeClr val="lt1"/>
+          </a:fontRef>
+        </p:style>
+        <p:txBody>
+          <a:bodyPr rtlCol="0" anchor="ctr"/>
+          <a:lstStyle/>
+          <a:p>
+            <a:pPr algn="ctr"/>
           </a:p>
         </p:txBody>
       </p:sp>
@@ -4234,14 +4430,58 @@
       <p:grpSpPr/>
       <p:sp>
         <p:nvSpPr>
-          <p:cNvPr id="2" name="TextBox 1"/>
+          <p:cNvPr id="2" name="Rectangle 1"/>
+          <p:cNvSpPr/>
+          <p:nvPr/>
+        </p:nvSpPr>
+        <p:spPr>
+          <a:xfrm>
+            <a:off x="0" y="0"/>
+            <a:ext cx="12191695" cy="6858000"/>
+          </a:xfrm>
+          <a:prstGeom prst="rect">
+            <a:avLst/>
+          </a:prstGeom>
+          <a:solidFill>
+            <a:srgbClr val="3B5A40"/>
+          </a:solidFill>
+          <a:ln>
+            <a:noFill/>
+          </a:ln>
+          <a:effectLst/>
+        </p:spPr>
+        <p:style>
+          <a:lnRef idx="1">
+            <a:schemeClr val="accent1"/>
+          </a:lnRef>
+          <a:fillRef idx="3">
+            <a:schemeClr val="accent1"/>
+          </a:fillRef>
+          <a:effectRef idx="2">
+            <a:schemeClr val="accent1"/>
+          </a:effectRef>
+          <a:fontRef idx="minor">
+            <a:schemeClr val="lt1"/>
+          </a:fontRef>
+        </p:style>
+        <p:txBody>
+          <a:bodyPr rtlCol="0" anchor="ctr"/>
+          <a:lstStyle/>
+          <a:p>
+            <a:pPr algn="ctr"/>
+          </a:p>
+        </p:txBody>
+      </p:sp>
+      <p:sp>
+        <p:nvSpPr>
+          <p:cNvPr id="3" name="TextBox 2"/>
           <p:cNvSpPr txBox="1"/>
           <p:nvPr/>
         </p:nvSpPr>
         <p:spPr>
           <a:xfrm>
-            <a:off x="731520" y="2743200"/>
-            <a:ext cx="10698480" cy="1371600"/>
+            <a:off x="822960" y="0"/>
+            <a:ext cx="10515600" cy="6858000"/>
           </a:xfrm>
           <a:prstGeom prst="rect">
             <a:avLst/>
@@ -4249,19 +4489,107 @@
           <a:noFill/>
         </p:spPr>
         <p:txBody>
+          <a:bodyPr wrap="square" anchor="ctr">
+            <a:spAutoFit/>
+          </a:bodyPr>
+          <a:lstStyle/>
+          <a:p>
+            <a:pPr>
+              <a:spcAft>
+                <a:spcPts val="600"/>
+              </a:spcAft>
+            </a:pPr>
+            <a:r>
+              <a:rPr sz="3400" b="1">
+                <a:solidFill>
+                  <a:srgbClr val="FFFFFF"/>
+                </a:solidFill>
+                <a:latin typeface="Georgia"/>
+              </a:rPr>
+              <a:t>AI-use disclosure</a:t>
+            </a:r>
+          </a:p>
+        </p:txBody>
+      </p:sp>
+      <p:sp>
+        <p:nvSpPr>
+          <p:cNvPr id="4" name="Rectangle 3"/>
+          <p:cNvSpPr/>
+          <p:nvPr/>
+        </p:nvSpPr>
+        <p:spPr>
+          <a:xfrm>
+            <a:off x="868680" y="4160520"/>
+            <a:ext cx="2377440" cy="38100"/>
+          </a:xfrm>
+          <a:prstGeom prst="rect">
+            <a:avLst/>
+          </a:prstGeom>
+          <a:solidFill>
+            <a:srgbClr val="7D9D74"/>
+          </a:solidFill>
+          <a:ln>
+            <a:noFill/>
+          </a:ln>
+          <a:effectLst/>
+        </p:spPr>
+        <p:style>
+          <a:lnRef idx="1">
+            <a:schemeClr val="accent1"/>
+          </a:lnRef>
+          <a:fillRef idx="3">
+            <a:schemeClr val="accent1"/>
+          </a:fillRef>
+          <a:effectRef idx="2">
+            <a:schemeClr val="accent1"/>
+          </a:effectRef>
+          <a:fontRef idx="minor">
+            <a:schemeClr val="lt1"/>
+          </a:fontRef>
+        </p:style>
+        <p:txBody>
+          <a:bodyPr rtlCol="0" anchor="ctr"/>
+          <a:lstStyle/>
+          <a:p>
+            <a:pPr algn="ctr"/>
+          </a:p>
+        </p:txBody>
+      </p:sp>
+      <p:sp>
+        <p:nvSpPr>
+          <p:cNvPr id="5" name="TextBox 4"/>
+          <p:cNvSpPr txBox="1"/>
+          <p:nvPr/>
+        </p:nvSpPr>
+        <p:spPr>
+          <a:xfrm>
+            <a:off x="10881360" y="6126480"/>
+            <a:ext cx="640080" cy="365760"/>
+          </a:xfrm>
+          <a:prstGeom prst="rect">
+            <a:avLst/>
+          </a:prstGeom>
+          <a:noFill/>
+        </p:spPr>
+        <p:txBody>
           <a:bodyPr wrap="square">
             <a:spAutoFit/>
           </a:bodyPr>
           <a:lstStyle/>
           <a:p>
-            <a:pPr algn="ctr"/>
-            <a:r>
-              <a:rPr sz="3400" b="1">
+            <a:pPr algn="r">
+              <a:spcAft>
+                <a:spcPts val="600"/>
+              </a:spcAft>
+            </a:pPr>
+            <a:r>
+              <a:rPr sz="1100" b="0">
                 <a:solidFill>
-                  <a:srgbClr val="2F5D62"/>
+                  <a:srgbClr val="FFFFFF"/>
                 </a:solidFill>
+                <a:latin typeface="Calibri"/>
               </a:rPr>
-              <a:t>AI-use disclosure</a:t>
+              <a:t>10</a:t>
             </a:r>
           </a:p>
         </p:txBody>
@@ -4286,14 +4614,58 @@
       <p:grpSpPr/>
       <p:sp>
         <p:nvSpPr>
-          <p:cNvPr id="2" name="TextBox 1"/>
+          <p:cNvPr id="2" name="Rectangle 1"/>
+          <p:cNvSpPr/>
+          <p:nvPr/>
+        </p:nvSpPr>
+        <p:spPr>
+          <a:xfrm>
+            <a:off x="0" y="0"/>
+            <a:ext cx="12191695" cy="6858000"/>
+          </a:xfrm>
+          <a:prstGeom prst="rect">
+            <a:avLst/>
+          </a:prstGeom>
+          <a:solidFill>
+            <a:srgbClr val="3B5A40"/>
+          </a:solidFill>
+          <a:ln>
+            <a:noFill/>
+          </a:ln>
+          <a:effectLst/>
+        </p:spPr>
+        <p:style>
+          <a:lnRef idx="1">
+            <a:schemeClr val="accent1"/>
+          </a:lnRef>
+          <a:fillRef idx="3">
+            <a:schemeClr val="accent1"/>
+          </a:fillRef>
+          <a:effectRef idx="2">
+            <a:schemeClr val="accent1"/>
+          </a:effectRef>
+          <a:fontRef idx="minor">
+            <a:schemeClr val="lt1"/>
+          </a:fontRef>
+        </p:style>
+        <p:txBody>
+          <a:bodyPr rtlCol="0" anchor="ctr"/>
+          <a:lstStyle/>
+          <a:p>
+            <a:pPr algn="ctr"/>
+          </a:p>
+        </p:txBody>
+      </p:sp>
+      <p:sp>
+        <p:nvSpPr>
+          <p:cNvPr id="3" name="TextBox 2"/>
           <p:cNvSpPr txBox="1"/>
           <p:nvPr/>
         </p:nvSpPr>
         <p:spPr>
           <a:xfrm>
-            <a:off x="731520" y="2743200"/>
-            <a:ext cx="10698480" cy="1371600"/>
+            <a:off x="822960" y="0"/>
+            <a:ext cx="10515600" cy="6858000"/>
           </a:xfrm>
           <a:prstGeom prst="rect">
             <a:avLst/>
@@ -4301,19 +4673,107 @@
           <a:noFill/>
         </p:spPr>
         <p:txBody>
+          <a:bodyPr wrap="square" anchor="ctr">
+            <a:spAutoFit/>
+          </a:bodyPr>
+          <a:lstStyle/>
+          <a:p>
+            <a:pPr>
+              <a:spcAft>
+                <a:spcPts val="600"/>
+              </a:spcAft>
+            </a:pPr>
+            <a:r>
+              <a:rPr sz="3400" b="1">
+                <a:solidFill>
+                  <a:srgbClr val="FFFFFF"/>
+                </a:solidFill>
+                <a:latin typeface="Georgia"/>
+              </a:rPr>
+              <a:t>Why polyphenols as food antimicrobials?</a:t>
+            </a:r>
+          </a:p>
+        </p:txBody>
+      </p:sp>
+      <p:sp>
+        <p:nvSpPr>
+          <p:cNvPr id="4" name="Rectangle 3"/>
+          <p:cNvSpPr/>
+          <p:nvPr/>
+        </p:nvSpPr>
+        <p:spPr>
+          <a:xfrm>
+            <a:off x="868680" y="4160520"/>
+            <a:ext cx="2377440" cy="38100"/>
+          </a:xfrm>
+          <a:prstGeom prst="rect">
+            <a:avLst/>
+          </a:prstGeom>
+          <a:solidFill>
+            <a:srgbClr val="7D9D74"/>
+          </a:solidFill>
+          <a:ln>
+            <a:noFill/>
+          </a:ln>
+          <a:effectLst/>
+        </p:spPr>
+        <p:style>
+          <a:lnRef idx="1">
+            <a:schemeClr val="accent1"/>
+          </a:lnRef>
+          <a:fillRef idx="3">
+            <a:schemeClr val="accent1"/>
+          </a:fillRef>
+          <a:effectRef idx="2">
+            <a:schemeClr val="accent1"/>
+          </a:effectRef>
+          <a:fontRef idx="minor">
+            <a:schemeClr val="lt1"/>
+          </a:fontRef>
+        </p:style>
+        <p:txBody>
+          <a:bodyPr rtlCol="0" anchor="ctr"/>
+          <a:lstStyle/>
+          <a:p>
+            <a:pPr algn="ctr"/>
+          </a:p>
+        </p:txBody>
+      </p:sp>
+      <p:sp>
+        <p:nvSpPr>
+          <p:cNvPr id="5" name="TextBox 4"/>
+          <p:cNvSpPr txBox="1"/>
+          <p:nvPr/>
+        </p:nvSpPr>
+        <p:spPr>
+          <a:xfrm>
+            <a:off x="10881360" y="6126480"/>
+            <a:ext cx="640080" cy="365760"/>
+          </a:xfrm>
+          <a:prstGeom prst="rect">
+            <a:avLst/>
+          </a:prstGeom>
+          <a:noFill/>
+        </p:spPr>
+        <p:txBody>
           <a:bodyPr wrap="square">
             <a:spAutoFit/>
           </a:bodyPr>
           <a:lstStyle/>
           <a:p>
-            <a:pPr algn="ctr"/>
-            <a:r>
-              <a:rPr sz="3400" b="1">
+            <a:pPr algn="r">
+              <a:spcAft>
+                <a:spcPts val="600"/>
+              </a:spcAft>
+            </a:pPr>
+            <a:r>
+              <a:rPr sz="1100" b="0">
                 <a:solidFill>
-                  <a:srgbClr val="2F5D62"/>
+                  <a:srgbClr val="FFFFFF"/>
                 </a:solidFill>
+                <a:latin typeface="Calibri"/>
               </a:rPr>
-              <a:t>Why polyphenols as food antimicrobials?</a:t>
+              <a:t>2</a:t>
             </a:r>
           </a:p>
         </p:txBody>
@@ -4338,14 +4798,102 @@
       <p:grpSpPr/>
       <p:sp>
         <p:nvSpPr>
-          <p:cNvPr id="2" name="TextBox 1"/>
+          <p:cNvPr id="2" name="Rectangle 1"/>
+          <p:cNvSpPr/>
+          <p:nvPr/>
+        </p:nvSpPr>
+        <p:spPr>
+          <a:xfrm>
+            <a:off x="0" y="0"/>
+            <a:ext cx="12191695" cy="6858000"/>
+          </a:xfrm>
+          <a:prstGeom prst="rect">
+            <a:avLst/>
+          </a:prstGeom>
+          <a:solidFill>
+            <a:srgbClr val="FFFFFF"/>
+          </a:solidFill>
+          <a:ln>
+            <a:noFill/>
+          </a:ln>
+          <a:effectLst/>
+        </p:spPr>
+        <p:style>
+          <a:lnRef idx="1">
+            <a:schemeClr val="accent1"/>
+          </a:lnRef>
+          <a:fillRef idx="3">
+            <a:schemeClr val="accent1"/>
+          </a:fillRef>
+          <a:effectRef idx="2">
+            <a:schemeClr val="accent1"/>
+          </a:effectRef>
+          <a:fontRef idx="minor">
+            <a:schemeClr val="lt1"/>
+          </a:fontRef>
+        </p:style>
+        <p:txBody>
+          <a:bodyPr rtlCol="0" anchor="ctr"/>
+          <a:lstStyle/>
+          <a:p>
+            <a:pPr algn="ctr"/>
+          </a:p>
+        </p:txBody>
+      </p:sp>
+      <p:sp>
+        <p:nvSpPr>
+          <p:cNvPr id="3" name="Rectangle 2"/>
+          <p:cNvSpPr/>
+          <p:nvPr/>
+        </p:nvSpPr>
+        <p:spPr>
+          <a:xfrm>
+            <a:off x="0" y="0"/>
+            <a:ext cx="146304" cy="6858000"/>
+          </a:xfrm>
+          <a:prstGeom prst="rect">
+            <a:avLst/>
+          </a:prstGeom>
+          <a:solidFill>
+            <a:srgbClr val="3B5A40"/>
+          </a:solidFill>
+          <a:ln>
+            <a:noFill/>
+          </a:ln>
+          <a:effectLst/>
+        </p:spPr>
+        <p:style>
+          <a:lnRef idx="1">
+            <a:schemeClr val="accent1"/>
+          </a:lnRef>
+          <a:fillRef idx="3">
+            <a:schemeClr val="accent1"/>
+          </a:fillRef>
+          <a:effectRef idx="2">
+            <a:schemeClr val="accent1"/>
+          </a:effectRef>
+          <a:fontRef idx="minor">
+            <a:schemeClr val="lt1"/>
+          </a:fontRef>
+        </p:style>
+        <p:txBody>
+          <a:bodyPr rtlCol="0" anchor="ctr"/>
+          <a:lstStyle/>
+          <a:p>
+            <a:pPr algn="ctr"/>
+          </a:p>
+        </p:txBody>
+      </p:sp>
+      <p:sp>
+        <p:nvSpPr>
+          <p:cNvPr id="4" name="TextBox 3"/>
           <p:cNvSpPr txBox="1"/>
           <p:nvPr/>
         </p:nvSpPr>
         <p:spPr>
           <a:xfrm>
-            <a:off x="548640" y="365760"/>
-            <a:ext cx="11064240" cy="914400"/>
+            <a:off x="640080" y="384048"/>
+            <a:ext cx="10881360" cy="822960"/>
           </a:xfrm>
           <a:prstGeom prst="rect">
             <a:avLst/>
@@ -4358,12 +4906,17 @@
           </a:bodyPr>
           <a:lstStyle/>
           <a:p>
-            <a:pPr/>
-            <a:r>
-              <a:rPr sz="3000" b="1">
+            <a:pPr>
+              <a:spcAft>
+                <a:spcPts val="600"/>
+              </a:spcAft>
+            </a:pPr>
+            <a:r>
+              <a:rPr sz="2600" b="1">
                 <a:solidFill>
-                  <a:srgbClr val="2F5D62"/>
+                  <a:srgbClr val="3B5A40"/>
                 </a:solidFill>
+                <a:latin typeface="Georgia"/>
               </a:rPr>
               <a:t>Polyphenols are bioactive antimicrobial agents</a:t>
             </a:r>
@@ -4372,14 +4925,58 @@
       </p:sp>
       <p:sp>
         <p:nvSpPr>
-          <p:cNvPr id="3" name="TextBox 2"/>
+          <p:cNvPr id="5" name="Rectangle 4"/>
+          <p:cNvSpPr/>
+          <p:nvPr/>
+        </p:nvSpPr>
+        <p:spPr>
+          <a:xfrm>
+            <a:off x="658368" y="1170432"/>
+            <a:ext cx="2011680" cy="27940"/>
+          </a:xfrm>
+          <a:prstGeom prst="rect">
+            <a:avLst/>
+          </a:prstGeom>
+          <a:solidFill>
+            <a:srgbClr val="7D9D74"/>
+          </a:solidFill>
+          <a:ln>
+            <a:noFill/>
+          </a:ln>
+          <a:effectLst/>
+        </p:spPr>
+        <p:style>
+          <a:lnRef idx="1">
+            <a:schemeClr val="accent1"/>
+          </a:lnRef>
+          <a:fillRef idx="3">
+            <a:schemeClr val="accent1"/>
+          </a:fillRef>
+          <a:effectRef idx="2">
+            <a:schemeClr val="accent1"/>
+          </a:effectRef>
+          <a:fontRef idx="minor">
+            <a:schemeClr val="lt1"/>
+          </a:fontRef>
+        </p:style>
+        <p:txBody>
+          <a:bodyPr rtlCol="0" anchor="ctr"/>
+          <a:lstStyle/>
+          <a:p>
+            <a:pPr algn="ctr"/>
+          </a:p>
+        </p:txBody>
+      </p:sp>
+      <p:sp>
+        <p:nvSpPr>
+          <p:cNvPr id="6" name="TextBox 5"/>
           <p:cNvSpPr txBox="1"/>
           <p:nvPr/>
         </p:nvSpPr>
         <p:spPr>
           <a:xfrm>
-            <a:off x="640080" y="1463040"/>
-            <a:ext cx="10881360" cy="4937760"/>
+            <a:off x="731520" y="1463040"/>
+            <a:ext cx="10789920" cy="4754880"/>
           </a:xfrm>
           <a:prstGeom prst="rect">
             <a:avLst/>
@@ -4392,47 +4989,225 @@
           </a:bodyPr>
           <a:lstStyle/>
           <a:p>
-            <a:pPr/>
-            <a:r>
-              <a:rPr sz="1800" b="0">
+            <a:pPr>
+              <a:spcAft>
+                <a:spcPts val="900"/>
+              </a:spcAft>
+            </a:pPr>
+            <a:r>
+              <a:rPr sz="1800">
                 <a:solidFill>
-                  <a:srgbClr val="1A1A1A"/>
+                  <a:srgbClr val="3B5A40"/>
                 </a:solidFill>
+                <a:latin typeface="Calibri"/>
               </a:rPr>
-              <a:t>• Recognised as bioactive compounds and antimicrobial agents</a:t>
-            </a:r>
-          </a:p>
-          <a:p>
-            <a:pPr/>
-            <a:r>
-              <a:rPr sz="1800" b="0">
+              <a:t>▪  </a:t>
+            </a:r>
+            <a:r>
+              <a:rPr sz="1800">
                 <a:solidFill>
-                  <a:srgbClr val="1A1A1A"/>
+                  <a:srgbClr val="20261F"/>
                 </a:solidFill>
+                <a:latin typeface="Calibri"/>
               </a:rPr>
-              <a:t>• Enhance food safety and preservation</a:t>
-            </a:r>
-          </a:p>
-          <a:p>
-            <a:pPr/>
-            <a:r>
-              <a:rPr sz="1800" b="0">
+              <a:t>Recognised as bioactive compounds and antimicrobial agents</a:t>
+            </a:r>
+          </a:p>
+          <a:p>
+            <a:pPr>
+              <a:spcAft>
+                <a:spcPts val="900"/>
+              </a:spcAft>
+            </a:pPr>
+            <a:r>
+              <a:rPr sz="1800">
                 <a:solidFill>
-                  <a:srgbClr val="1A1A1A"/>
+                  <a:srgbClr val="3B5A40"/>
                 </a:solidFill>
+                <a:latin typeface="Calibri"/>
               </a:rPr>
-              <a:t>• Extend product shelf life</a:t>
-            </a:r>
-          </a:p>
-          <a:p>
-            <a:pPr/>
-            <a:r>
-              <a:rPr sz="1800" b="0">
+              <a:t>▪  </a:t>
+            </a:r>
+            <a:r>
+              <a:rPr sz="1800">
                 <a:solidFill>
-                  <a:srgbClr val="1A1A1A"/>
+                  <a:srgbClr val="20261F"/>
                 </a:solidFill>
+                <a:latin typeface="Calibri"/>
               </a:rPr>
-              <a:t>• Positioned as natural alternatives to synthetic additives</a:t>
+              <a:t>Enhance food safety and preservation</a:t>
+            </a:r>
+          </a:p>
+          <a:p>
+            <a:pPr>
+              <a:spcAft>
+                <a:spcPts val="900"/>
+              </a:spcAft>
+            </a:pPr>
+            <a:r>
+              <a:rPr sz="1800">
+                <a:solidFill>
+                  <a:srgbClr val="3B5A40"/>
+                </a:solidFill>
+                <a:latin typeface="Calibri"/>
+              </a:rPr>
+              <a:t>▪  </a:t>
+            </a:r>
+            <a:r>
+              <a:rPr sz="1800">
+                <a:solidFill>
+                  <a:srgbClr val="20261F"/>
+                </a:solidFill>
+                <a:latin typeface="Calibri"/>
+              </a:rPr>
+              <a:t>Extend product shelf life</a:t>
+            </a:r>
+          </a:p>
+          <a:p>
+            <a:pPr>
+              <a:spcAft>
+                <a:spcPts val="900"/>
+              </a:spcAft>
+            </a:pPr>
+            <a:r>
+              <a:rPr sz="1800">
+                <a:solidFill>
+                  <a:srgbClr val="3B5A40"/>
+                </a:solidFill>
+                <a:latin typeface="Calibri"/>
+              </a:rPr>
+              <a:t>▪  </a:t>
+            </a:r>
+            <a:r>
+              <a:rPr sz="1800">
+                <a:solidFill>
+                  <a:srgbClr val="20261F"/>
+                </a:solidFill>
+                <a:latin typeface="Calibri"/>
+              </a:rPr>
+              <a:t>Positioned as natural alternatives to synthetic additives</a:t>
+            </a:r>
+          </a:p>
+        </p:txBody>
+      </p:sp>
+      <p:sp>
+        <p:nvSpPr>
+          <p:cNvPr id="7" name="Rectangle 6"/>
+          <p:cNvSpPr/>
+          <p:nvPr/>
+        </p:nvSpPr>
+        <p:spPr>
+          <a:xfrm>
+            <a:off x="640080" y="6419088"/>
+            <a:ext cx="10908792" cy="11430"/>
+          </a:xfrm>
+          <a:prstGeom prst="rect">
+            <a:avLst/>
+          </a:prstGeom>
+          <a:solidFill>
+            <a:srgbClr val="EEF1EC"/>
+          </a:solidFill>
+          <a:ln>
+            <a:noFill/>
+          </a:ln>
+          <a:effectLst/>
+        </p:spPr>
+        <p:style>
+          <a:lnRef idx="1">
+            <a:schemeClr val="accent1"/>
+          </a:lnRef>
+          <a:fillRef idx="3">
+            <a:schemeClr val="accent1"/>
+          </a:fillRef>
+          <a:effectRef idx="2">
+            <a:schemeClr val="accent1"/>
+          </a:effectRef>
+          <a:fontRef idx="minor">
+            <a:schemeClr val="lt1"/>
+          </a:fontRef>
+        </p:style>
+        <p:txBody>
+          <a:bodyPr rtlCol="0" anchor="ctr"/>
+          <a:lstStyle/>
+          <a:p>
+            <a:pPr algn="ctr"/>
+          </a:p>
+        </p:txBody>
+      </p:sp>
+      <p:sp>
+        <p:nvSpPr>
+          <p:cNvPr id="8" name="TextBox 7"/>
+          <p:cNvSpPr txBox="1"/>
+          <p:nvPr/>
+        </p:nvSpPr>
+        <p:spPr>
+          <a:xfrm>
+            <a:off x="640080" y="6455664"/>
+            <a:ext cx="8229600" cy="320040"/>
+          </a:xfrm>
+          <a:prstGeom prst="rect">
+            <a:avLst/>
+          </a:prstGeom>
+          <a:noFill/>
+        </p:spPr>
+        <p:txBody>
+          <a:bodyPr wrap="square">
+            <a:spAutoFit/>
+          </a:bodyPr>
+          <a:lstStyle/>
+          <a:p>
+            <a:pPr>
+              <a:spcAft>
+                <a:spcPts val="0"/>
+              </a:spcAft>
+            </a:pPr>
+            <a:r>
+              <a:rPr sz="900" b="0">
+                <a:solidFill>
+                  <a:srgbClr val="5C6357"/>
+                </a:solidFill>
+                <a:latin typeface="Calibri"/>
+              </a:rPr>
+              <a:t>Polyphenols · journal club</a:t>
+            </a:r>
+          </a:p>
+        </p:txBody>
+      </p:sp>
+      <p:sp>
+        <p:nvSpPr>
+          <p:cNvPr id="9" name="TextBox 8"/>
+          <p:cNvSpPr txBox="1"/>
+          <p:nvPr/>
+        </p:nvSpPr>
+        <p:spPr>
+          <a:xfrm>
+            <a:off x="10881360" y="6455664"/>
+            <a:ext cx="640080" cy="320040"/>
+          </a:xfrm>
+          <a:prstGeom prst="rect">
+            <a:avLst/>
+          </a:prstGeom>
+          <a:noFill/>
+        </p:spPr>
+        <p:txBody>
+          <a:bodyPr wrap="square">
+            <a:spAutoFit/>
+          </a:bodyPr>
+          <a:lstStyle/>
+          <a:p>
+            <a:pPr algn="r">
+              <a:spcAft>
+                <a:spcPts val="0"/>
+              </a:spcAft>
+            </a:pPr>
+            <a:r>
+              <a:rPr sz="900" b="0">
+                <a:solidFill>
+                  <a:srgbClr val="5C6357"/>
+                </a:solidFill>
+                <a:latin typeface="Calibri"/>
+              </a:rPr>
+              <a:t>3</a:t>
             </a:r>
           </a:p>
         </p:txBody>
@@ -4457,14 +5232,102 @@
       <p:grpSpPr/>
       <p:sp>
         <p:nvSpPr>
-          <p:cNvPr id="2" name="TextBox 1"/>
+          <p:cNvPr id="2" name="Rectangle 1"/>
+          <p:cNvSpPr/>
+          <p:nvPr/>
+        </p:nvSpPr>
+        <p:spPr>
+          <a:xfrm>
+            <a:off x="0" y="0"/>
+            <a:ext cx="12191695" cy="6858000"/>
+          </a:xfrm>
+          <a:prstGeom prst="rect">
+            <a:avLst/>
+          </a:prstGeom>
+          <a:solidFill>
+            <a:srgbClr val="FFFFFF"/>
+          </a:solidFill>
+          <a:ln>
+            <a:noFill/>
+          </a:ln>
+          <a:effectLst/>
+        </p:spPr>
+        <p:style>
+          <a:lnRef idx="1">
+            <a:schemeClr val="accent1"/>
+          </a:lnRef>
+          <a:fillRef idx="3">
+            <a:schemeClr val="accent1"/>
+          </a:fillRef>
+          <a:effectRef idx="2">
+            <a:schemeClr val="accent1"/>
+          </a:effectRef>
+          <a:fontRef idx="minor">
+            <a:schemeClr val="lt1"/>
+          </a:fontRef>
+        </p:style>
+        <p:txBody>
+          <a:bodyPr rtlCol="0" anchor="ctr"/>
+          <a:lstStyle/>
+          <a:p>
+            <a:pPr algn="ctr"/>
+          </a:p>
+        </p:txBody>
+      </p:sp>
+      <p:sp>
+        <p:nvSpPr>
+          <p:cNvPr id="3" name="Rectangle 2"/>
+          <p:cNvSpPr/>
+          <p:nvPr/>
+        </p:nvSpPr>
+        <p:spPr>
+          <a:xfrm>
+            <a:off x="0" y="0"/>
+            <a:ext cx="146304" cy="6858000"/>
+          </a:xfrm>
+          <a:prstGeom prst="rect">
+            <a:avLst/>
+          </a:prstGeom>
+          <a:solidFill>
+            <a:srgbClr val="3B5A40"/>
+          </a:solidFill>
+          <a:ln>
+            <a:noFill/>
+          </a:ln>
+          <a:effectLst/>
+        </p:spPr>
+        <p:style>
+          <a:lnRef idx="1">
+            <a:schemeClr val="accent1"/>
+          </a:lnRef>
+          <a:fillRef idx="3">
+            <a:schemeClr val="accent1"/>
+          </a:fillRef>
+          <a:effectRef idx="2">
+            <a:schemeClr val="accent1"/>
+          </a:effectRef>
+          <a:fontRef idx="minor">
+            <a:schemeClr val="lt1"/>
+          </a:fontRef>
+        </p:style>
+        <p:txBody>
+          <a:bodyPr rtlCol="0" anchor="ctr"/>
+          <a:lstStyle/>
+          <a:p>
+            <a:pPr algn="ctr"/>
+          </a:p>
+        </p:txBody>
+      </p:sp>
+      <p:sp>
+        <p:nvSpPr>
+          <p:cNvPr id="4" name="TextBox 3"/>
           <p:cNvSpPr txBox="1"/>
           <p:nvPr/>
         </p:nvSpPr>
         <p:spPr>
           <a:xfrm>
-            <a:off x="548640" y="365760"/>
-            <a:ext cx="11064240" cy="914400"/>
+            <a:off x="640080" y="384048"/>
+            <a:ext cx="10881360" cy="822960"/>
           </a:xfrm>
           <a:prstGeom prst="rect">
             <a:avLst/>
@@ -4477,12 +5340,17 @@
           </a:bodyPr>
           <a:lstStyle/>
           <a:p>
-            <a:pPr/>
-            <a:r>
-              <a:rPr sz="3000" b="1">
+            <a:pPr>
+              <a:spcAft>
+                <a:spcPts val="600"/>
+              </a:spcAft>
+            </a:pPr>
+            <a:r>
+              <a:rPr sz="2600" b="1">
                 <a:solidFill>
-                  <a:srgbClr val="2F5D62"/>
+                  <a:srgbClr val="3B5A40"/>
                 </a:solidFill>
+                <a:latin typeface="Georgia"/>
               </a:rPr>
               <a:t>Antimicrobial action traces to their chemistry</a:t>
             </a:r>
@@ -4491,14 +5359,58 @@
       </p:sp>
       <p:sp>
         <p:nvSpPr>
-          <p:cNvPr id="3" name="TextBox 2"/>
+          <p:cNvPr id="5" name="Rectangle 4"/>
+          <p:cNvSpPr/>
+          <p:nvPr/>
+        </p:nvSpPr>
+        <p:spPr>
+          <a:xfrm>
+            <a:off x="658368" y="1170432"/>
+            <a:ext cx="2011680" cy="27940"/>
+          </a:xfrm>
+          <a:prstGeom prst="rect">
+            <a:avLst/>
+          </a:prstGeom>
+          <a:solidFill>
+            <a:srgbClr val="7D9D74"/>
+          </a:solidFill>
+          <a:ln>
+            <a:noFill/>
+          </a:ln>
+          <a:effectLst/>
+        </p:spPr>
+        <p:style>
+          <a:lnRef idx="1">
+            <a:schemeClr val="accent1"/>
+          </a:lnRef>
+          <a:fillRef idx="3">
+            <a:schemeClr val="accent1"/>
+          </a:fillRef>
+          <a:effectRef idx="2">
+            <a:schemeClr val="accent1"/>
+          </a:effectRef>
+          <a:fontRef idx="minor">
+            <a:schemeClr val="lt1"/>
+          </a:fontRef>
+        </p:style>
+        <p:txBody>
+          <a:bodyPr rtlCol="0" anchor="ctr"/>
+          <a:lstStyle/>
+          <a:p>
+            <a:pPr algn="ctr"/>
+          </a:p>
+        </p:txBody>
+      </p:sp>
+      <p:sp>
+        <p:nvSpPr>
+          <p:cNvPr id="6" name="TextBox 5"/>
           <p:cNvSpPr txBox="1"/>
           <p:nvPr/>
         </p:nvSpPr>
         <p:spPr>
           <a:xfrm>
-            <a:off x="640080" y="1463040"/>
-            <a:ext cx="10881360" cy="4937760"/>
+            <a:off x="731520" y="1463040"/>
+            <a:ext cx="10789920" cy="4754880"/>
           </a:xfrm>
           <a:prstGeom prst="rect">
             <a:avLst/>
@@ -4511,36 +5423,200 @@
           </a:bodyPr>
           <a:lstStyle/>
           <a:p>
-            <a:pPr/>
-            <a:r>
-              <a:rPr sz="1800" b="0">
+            <a:pPr>
+              <a:spcAft>
+                <a:spcPts val="900"/>
+              </a:spcAft>
+            </a:pPr>
+            <a:r>
+              <a:rPr sz="1800">
                 <a:solidFill>
-                  <a:srgbClr val="1A1A1A"/>
+                  <a:srgbClr val="3B5A40"/>
                 </a:solidFill>
+                <a:latin typeface="Calibri"/>
               </a:rPr>
-              <a:t>• Hydroxyl groups and electron delocalization drive activity</a:t>
-            </a:r>
-          </a:p>
-          <a:p>
-            <a:pPr/>
-            <a:r>
-              <a:rPr sz="1800" b="0">
+              <a:t>▪  </a:t>
+            </a:r>
+            <a:r>
+              <a:rPr sz="1800">
                 <a:solidFill>
-                  <a:srgbClr val="1A1A1A"/>
+                  <a:srgbClr val="20261F"/>
                 </a:solidFill>
+                <a:latin typeface="Calibri"/>
               </a:rPr>
-              <a:t>• Interact with microbial cell membranes, proteins, and organelles</a:t>
-            </a:r>
-          </a:p>
-          <a:p>
-            <a:pPr/>
-            <a:r>
-              <a:rPr sz="1800" b="0">
+              <a:t>Hydroxyl groups and electron delocalization drive activity</a:t>
+            </a:r>
+          </a:p>
+          <a:p>
+            <a:pPr>
+              <a:spcAft>
+                <a:spcPts val="900"/>
+              </a:spcAft>
+            </a:pPr>
+            <a:r>
+              <a:rPr sz="1800">
                 <a:solidFill>
-                  <a:srgbClr val="1A1A1A"/>
+                  <a:srgbClr val="3B5A40"/>
                 </a:solidFill>
+                <a:latin typeface="Calibri"/>
               </a:rPr>
-              <a:t>• Form complexes with metal ions — further amplifying activity</a:t>
+              <a:t>▪  </a:t>
+            </a:r>
+            <a:r>
+              <a:rPr sz="1800">
+                <a:solidFill>
+                  <a:srgbClr val="20261F"/>
+                </a:solidFill>
+                <a:latin typeface="Calibri"/>
+              </a:rPr>
+              <a:t>Interact with microbial cell membranes, proteins, and organelles</a:t>
+            </a:r>
+          </a:p>
+          <a:p>
+            <a:pPr>
+              <a:spcAft>
+                <a:spcPts val="900"/>
+              </a:spcAft>
+            </a:pPr>
+            <a:r>
+              <a:rPr sz="1800">
+                <a:solidFill>
+                  <a:srgbClr val="3B5A40"/>
+                </a:solidFill>
+                <a:latin typeface="Calibri"/>
+              </a:rPr>
+              <a:t>▪  </a:t>
+            </a:r>
+            <a:r>
+              <a:rPr sz="1800">
+                <a:solidFill>
+                  <a:srgbClr val="20261F"/>
+                </a:solidFill>
+                <a:latin typeface="Calibri"/>
+              </a:rPr>
+              <a:t>Form complexes with metal ions — further amplifying activity</a:t>
+            </a:r>
+          </a:p>
+        </p:txBody>
+      </p:sp>
+      <p:sp>
+        <p:nvSpPr>
+          <p:cNvPr id="7" name="Rectangle 6"/>
+          <p:cNvSpPr/>
+          <p:nvPr/>
+        </p:nvSpPr>
+        <p:spPr>
+          <a:xfrm>
+            <a:off x="640080" y="6419088"/>
+            <a:ext cx="10908792" cy="11430"/>
+          </a:xfrm>
+          <a:prstGeom prst="rect">
+            <a:avLst/>
+          </a:prstGeom>
+          <a:solidFill>
+            <a:srgbClr val="EEF1EC"/>
+          </a:solidFill>
+          <a:ln>
+            <a:noFill/>
+          </a:ln>
+          <a:effectLst/>
+        </p:spPr>
+        <p:style>
+          <a:lnRef idx="1">
+            <a:schemeClr val="accent1"/>
+          </a:lnRef>
+          <a:fillRef idx="3">
+            <a:schemeClr val="accent1"/>
+          </a:fillRef>
+          <a:effectRef idx="2">
+            <a:schemeClr val="accent1"/>
+          </a:effectRef>
+          <a:fontRef idx="minor">
+            <a:schemeClr val="lt1"/>
+          </a:fontRef>
+        </p:style>
+        <p:txBody>
+          <a:bodyPr rtlCol="0" anchor="ctr"/>
+          <a:lstStyle/>
+          <a:p>
+            <a:pPr algn="ctr"/>
+          </a:p>
+        </p:txBody>
+      </p:sp>
+      <p:sp>
+        <p:nvSpPr>
+          <p:cNvPr id="8" name="TextBox 7"/>
+          <p:cNvSpPr txBox="1"/>
+          <p:nvPr/>
+        </p:nvSpPr>
+        <p:spPr>
+          <a:xfrm>
+            <a:off x="640080" y="6455664"/>
+            <a:ext cx="8229600" cy="320040"/>
+          </a:xfrm>
+          <a:prstGeom prst="rect">
+            <a:avLst/>
+          </a:prstGeom>
+          <a:noFill/>
+        </p:spPr>
+        <p:txBody>
+          <a:bodyPr wrap="square">
+            <a:spAutoFit/>
+          </a:bodyPr>
+          <a:lstStyle/>
+          <a:p>
+            <a:pPr>
+              <a:spcAft>
+                <a:spcPts val="0"/>
+              </a:spcAft>
+            </a:pPr>
+            <a:r>
+              <a:rPr sz="900" b="0">
+                <a:solidFill>
+                  <a:srgbClr val="5C6357"/>
+                </a:solidFill>
+                <a:latin typeface="Calibri"/>
+              </a:rPr>
+              <a:t>Polyphenols · journal club</a:t>
+            </a:r>
+          </a:p>
+        </p:txBody>
+      </p:sp>
+      <p:sp>
+        <p:nvSpPr>
+          <p:cNvPr id="9" name="TextBox 8"/>
+          <p:cNvSpPr txBox="1"/>
+          <p:nvPr/>
+        </p:nvSpPr>
+        <p:spPr>
+          <a:xfrm>
+            <a:off x="10881360" y="6455664"/>
+            <a:ext cx="640080" cy="320040"/>
+          </a:xfrm>
+          <a:prstGeom prst="rect">
+            <a:avLst/>
+          </a:prstGeom>
+          <a:noFill/>
+        </p:spPr>
+        <p:txBody>
+          <a:bodyPr wrap="square">
+            <a:spAutoFit/>
+          </a:bodyPr>
+          <a:lstStyle/>
+          <a:p>
+            <a:pPr algn="r">
+              <a:spcAft>
+                <a:spcPts val="0"/>
+              </a:spcAft>
+            </a:pPr>
+            <a:r>
+              <a:rPr sz="900" b="0">
+                <a:solidFill>
+                  <a:srgbClr val="5C6357"/>
+                </a:solidFill>
+                <a:latin typeface="Calibri"/>
+              </a:rPr>
+              <a:t>4</a:t>
             </a:r>
           </a:p>
         </p:txBody>
@@ -4565,14 +5641,102 @@
       <p:grpSpPr/>
       <p:sp>
         <p:nvSpPr>
-          <p:cNvPr id="2" name="TextBox 1"/>
+          <p:cNvPr id="2" name="Rectangle 1"/>
+          <p:cNvSpPr/>
+          <p:nvPr/>
+        </p:nvSpPr>
+        <p:spPr>
+          <a:xfrm>
+            <a:off x="0" y="0"/>
+            <a:ext cx="12191695" cy="6858000"/>
+          </a:xfrm>
+          <a:prstGeom prst="rect">
+            <a:avLst/>
+          </a:prstGeom>
+          <a:solidFill>
+            <a:srgbClr val="FFFFFF"/>
+          </a:solidFill>
+          <a:ln>
+            <a:noFill/>
+          </a:ln>
+          <a:effectLst/>
+        </p:spPr>
+        <p:style>
+          <a:lnRef idx="1">
+            <a:schemeClr val="accent1"/>
+          </a:lnRef>
+          <a:fillRef idx="3">
+            <a:schemeClr val="accent1"/>
+          </a:fillRef>
+          <a:effectRef idx="2">
+            <a:schemeClr val="accent1"/>
+          </a:effectRef>
+          <a:fontRef idx="minor">
+            <a:schemeClr val="lt1"/>
+          </a:fontRef>
+        </p:style>
+        <p:txBody>
+          <a:bodyPr rtlCol="0" anchor="ctr"/>
+          <a:lstStyle/>
+          <a:p>
+            <a:pPr algn="ctr"/>
+          </a:p>
+        </p:txBody>
+      </p:sp>
+      <p:sp>
+        <p:nvSpPr>
+          <p:cNvPr id="3" name="Rectangle 2"/>
+          <p:cNvSpPr/>
+          <p:nvPr/>
+        </p:nvSpPr>
+        <p:spPr>
+          <a:xfrm>
+            <a:off x="0" y="0"/>
+            <a:ext cx="146304" cy="6858000"/>
+          </a:xfrm>
+          <a:prstGeom prst="rect">
+            <a:avLst/>
+          </a:prstGeom>
+          <a:solidFill>
+            <a:srgbClr val="3B5A40"/>
+          </a:solidFill>
+          <a:ln>
+            <a:noFill/>
+          </a:ln>
+          <a:effectLst/>
+        </p:spPr>
+        <p:style>
+          <a:lnRef idx="1">
+            <a:schemeClr val="accent1"/>
+          </a:lnRef>
+          <a:fillRef idx="3">
+            <a:schemeClr val="accent1"/>
+          </a:fillRef>
+          <a:effectRef idx="2">
+            <a:schemeClr val="accent1"/>
+          </a:effectRef>
+          <a:fontRef idx="minor">
+            <a:schemeClr val="lt1"/>
+          </a:fontRef>
+        </p:style>
+        <p:txBody>
+          <a:bodyPr rtlCol="0" anchor="ctr"/>
+          <a:lstStyle/>
+          <a:p>
+            <a:pPr algn="ctr"/>
+          </a:p>
+        </p:txBody>
+      </p:sp>
+      <p:sp>
+        <p:nvSpPr>
+          <p:cNvPr id="4" name="TextBox 3"/>
           <p:cNvSpPr txBox="1"/>
           <p:nvPr/>
         </p:nvSpPr>
         <p:spPr>
           <a:xfrm>
-            <a:off x="548640" y="365760"/>
-            <a:ext cx="11064240" cy="914400"/>
+            <a:off x="640080" y="384048"/>
+            <a:ext cx="10881360" cy="822960"/>
           </a:xfrm>
           <a:prstGeom prst="rect">
             <a:avLst/>
@@ -4585,12 +5749,17 @@
           </a:bodyPr>
           <a:lstStyle/>
           <a:p>
-            <a:pPr/>
-            <a:r>
-              <a:rPr sz="3000" b="1">
+            <a:pPr>
+              <a:spcAft>
+                <a:spcPts val="600"/>
+              </a:spcAft>
+            </a:pPr>
+            <a:r>
+              <a:rPr sz="2600" b="1">
                 <a:solidFill>
-                  <a:srgbClr val="2F5D62"/>
+                  <a:srgbClr val="3B5A40"/>
                 </a:solidFill>
+                <a:latin typeface="Georgia"/>
               </a:rPr>
               <a:t>One class, several targets</a:t>
             </a:r>
@@ -4599,14 +5768,102 @@
       </p:sp>
       <p:sp>
         <p:nvSpPr>
-          <p:cNvPr id="3" name="TextBox 2"/>
+          <p:cNvPr id="5" name="Rectangle 4"/>
+          <p:cNvSpPr/>
+          <p:nvPr/>
+        </p:nvSpPr>
+        <p:spPr>
+          <a:xfrm>
+            <a:off x="658368" y="1170432"/>
+            <a:ext cx="2011680" cy="27940"/>
+          </a:xfrm>
+          <a:prstGeom prst="rect">
+            <a:avLst/>
+          </a:prstGeom>
+          <a:solidFill>
+            <a:srgbClr val="7D9D74"/>
+          </a:solidFill>
+          <a:ln>
+            <a:noFill/>
+          </a:ln>
+          <a:effectLst/>
+        </p:spPr>
+        <p:style>
+          <a:lnRef idx="1">
+            <a:schemeClr val="accent1"/>
+          </a:lnRef>
+          <a:fillRef idx="3">
+            <a:schemeClr val="accent1"/>
+          </a:fillRef>
+          <a:effectRef idx="2">
+            <a:schemeClr val="accent1"/>
+          </a:effectRef>
+          <a:fontRef idx="minor">
+            <a:schemeClr val="lt1"/>
+          </a:fontRef>
+        </p:style>
+        <p:txBody>
+          <a:bodyPr rtlCol="0" anchor="ctr"/>
+          <a:lstStyle/>
+          <a:p>
+            <a:pPr algn="ctr"/>
+          </a:p>
+        </p:txBody>
+      </p:sp>
+      <p:sp>
+        <p:nvSpPr>
+          <p:cNvPr id="6" name="Rectangle 5"/>
+          <p:cNvSpPr/>
+          <p:nvPr/>
+        </p:nvSpPr>
+        <p:spPr>
+          <a:xfrm>
+            <a:off x="731520" y="1481328"/>
+            <a:ext cx="5074920" cy="4663440"/>
+          </a:xfrm>
+          <a:prstGeom prst="rect">
+            <a:avLst/>
+          </a:prstGeom>
+          <a:solidFill>
+            <a:srgbClr val="F4F7F1"/>
+          </a:solidFill>
+          <a:ln>
+            <a:noFill/>
+          </a:ln>
+          <a:effectLst/>
+        </p:spPr>
+        <p:style>
+          <a:lnRef idx="1">
+            <a:schemeClr val="accent1"/>
+          </a:lnRef>
+          <a:fillRef idx="3">
+            <a:schemeClr val="accent1"/>
+          </a:fillRef>
+          <a:effectRef idx="2">
+            <a:schemeClr val="accent1"/>
+          </a:effectRef>
+          <a:fontRef idx="minor">
+            <a:schemeClr val="lt1"/>
+          </a:fontRef>
+        </p:style>
+        <p:txBody>
+          <a:bodyPr rtlCol="0" anchor="ctr"/>
+          <a:lstStyle/>
+          <a:p>
+            <a:pPr algn="ctr"/>
+          </a:p>
+        </p:txBody>
+      </p:sp>
+      <p:sp>
+        <p:nvSpPr>
+          <p:cNvPr id="7" name="TextBox 6"/>
           <p:cNvSpPr txBox="1"/>
           <p:nvPr/>
         </p:nvSpPr>
         <p:spPr>
           <a:xfrm>
-            <a:off x="640080" y="1463040"/>
-            <a:ext cx="5212080" cy="4937760"/>
+            <a:off x="960120" y="1645920"/>
+            <a:ext cx="4617720" cy="4389120"/>
           </a:xfrm>
           <a:prstGeom prst="rect">
             <a:avLst/>
@@ -4619,50 +5876,136 @@
           </a:bodyPr>
           <a:lstStyle/>
           <a:p>
-            <a:pPr/>
-            <a:r>
-              <a:rPr sz="1800" b="0">
+            <a:pPr>
+              <a:spcAft>
+                <a:spcPts val="900"/>
+              </a:spcAft>
+            </a:pPr>
+            <a:r>
+              <a:rPr sz="1700">
                 <a:solidFill>
-                  <a:srgbClr val="1A1A1A"/>
+                  <a:srgbClr val="3B5A40"/>
                 </a:solidFill>
+                <a:latin typeface="Calibri"/>
               </a:rPr>
-              <a:t>• Cell membrane — destructive damage</a:t>
-            </a:r>
-          </a:p>
-          <a:p>
-            <a:pPr/>
-            <a:r>
-              <a:rPr sz="1800" b="0">
+              <a:t>▪  </a:t>
+            </a:r>
+            <a:r>
+              <a:rPr sz="1700">
                 <a:solidFill>
-                  <a:srgbClr val="1A1A1A"/>
+                  <a:srgbClr val="20261F"/>
                 </a:solidFill>
+                <a:latin typeface="Calibri"/>
               </a:rPr>
-              <a:t>• Proteins — impaired / harmed</a:t>
-            </a:r>
-          </a:p>
-          <a:p>
-            <a:pPr/>
-            <a:r>
-              <a:rPr sz="1800" b="0">
+              <a:t>Cell membrane — destructive damage</a:t>
+            </a:r>
+          </a:p>
+          <a:p>
+            <a:pPr>
+              <a:spcAft>
+                <a:spcPts val="900"/>
+              </a:spcAft>
+            </a:pPr>
+            <a:r>
+              <a:rPr sz="1700">
                 <a:solidFill>
-                  <a:srgbClr val="1A1A1A"/>
+                  <a:srgbClr val="3B5A40"/>
                 </a:solidFill>
+                <a:latin typeface="Calibri"/>
               </a:rPr>
-              <a:t>• Nucleic acids — harmed</a:t>
-            </a:r>
-          </a:p>
-        </p:txBody>
-      </p:sp>
-      <p:sp>
-        <p:nvSpPr>
-          <p:cNvPr id="4" name="TextBox 3"/>
+              <a:t>▪  </a:t>
+            </a:r>
+            <a:r>
+              <a:rPr sz="1700">
+                <a:solidFill>
+                  <a:srgbClr val="20261F"/>
+                </a:solidFill>
+                <a:latin typeface="Calibri"/>
+              </a:rPr>
+              <a:t>Proteins — impaired / harmed</a:t>
+            </a:r>
+          </a:p>
+          <a:p>
+            <a:pPr>
+              <a:spcAft>
+                <a:spcPts val="900"/>
+              </a:spcAft>
+            </a:pPr>
+            <a:r>
+              <a:rPr sz="1700">
+                <a:solidFill>
+                  <a:srgbClr val="3B5A40"/>
+                </a:solidFill>
+                <a:latin typeface="Calibri"/>
+              </a:rPr>
+              <a:t>▪  </a:t>
+            </a:r>
+            <a:r>
+              <a:rPr sz="1700">
+                <a:solidFill>
+                  <a:srgbClr val="20261F"/>
+                </a:solidFill>
+                <a:latin typeface="Calibri"/>
+              </a:rPr>
+              <a:t>Nucleic acids — harmed</a:t>
+            </a:r>
+          </a:p>
+        </p:txBody>
+      </p:sp>
+      <p:sp>
+        <p:nvSpPr>
+          <p:cNvPr id="8" name="Rectangle 7"/>
+          <p:cNvSpPr/>
+          <p:nvPr/>
+        </p:nvSpPr>
+        <p:spPr>
+          <a:xfrm>
+            <a:off x="6400800" y="1481328"/>
+            <a:ext cx="5074920" cy="4663440"/>
+          </a:xfrm>
+          <a:prstGeom prst="rect">
+            <a:avLst/>
+          </a:prstGeom>
+          <a:solidFill>
+            <a:srgbClr val="F4F7F1"/>
+          </a:solidFill>
+          <a:ln>
+            <a:noFill/>
+          </a:ln>
+          <a:effectLst/>
+        </p:spPr>
+        <p:style>
+          <a:lnRef idx="1">
+            <a:schemeClr val="accent1"/>
+          </a:lnRef>
+          <a:fillRef idx="3">
+            <a:schemeClr val="accent1"/>
+          </a:fillRef>
+          <a:effectRef idx="2">
+            <a:schemeClr val="accent1"/>
+          </a:effectRef>
+          <a:fontRef idx="minor">
+            <a:schemeClr val="lt1"/>
+          </a:fontRef>
+        </p:style>
+        <p:txBody>
+          <a:bodyPr rtlCol="0" anchor="ctr"/>
+          <a:lstStyle/>
+          <a:p>
+            <a:pPr algn="ctr"/>
+          </a:p>
+        </p:txBody>
+      </p:sp>
+      <p:sp>
+        <p:nvSpPr>
+          <p:cNvPr id="9" name="TextBox 8"/>
           <p:cNvSpPr txBox="1"/>
           <p:nvPr/>
         </p:nvSpPr>
         <p:spPr>
           <a:xfrm>
-            <a:off x="6309360" y="1463040"/>
-            <a:ext cx="5212080" cy="4937760"/>
+            <a:off x="6629400" y="1645920"/>
+            <a:ext cx="4617720" cy="4389120"/>
           </a:xfrm>
           <a:prstGeom prst="rect">
             <a:avLst/>
@@ -4675,36 +6018,200 @@
           </a:bodyPr>
           <a:lstStyle/>
           <a:p>
-            <a:pPr/>
-            <a:r>
-              <a:rPr sz="1800" b="0">
+            <a:pPr>
+              <a:spcAft>
+                <a:spcPts val="900"/>
+              </a:spcAft>
+            </a:pPr>
+            <a:r>
+              <a:rPr sz="1700">
                 <a:solidFill>
-                  <a:srgbClr val="1A1A1A"/>
+                  <a:srgbClr val="3B5A40"/>
                 </a:solidFill>
+                <a:latin typeface="Calibri"/>
               </a:rPr>
-              <a:t>• Metabolic pathways — reduced efficiency</a:t>
-            </a:r>
-          </a:p>
-          <a:p>
-            <a:pPr/>
-            <a:r>
-              <a:rPr sz="1800" b="0">
+              <a:t>▪  </a:t>
+            </a:r>
+            <a:r>
+              <a:rPr sz="1700">
                 <a:solidFill>
-                  <a:srgbClr val="1A1A1A"/>
+                  <a:srgbClr val="20261F"/>
                 </a:solidFill>
+                <a:latin typeface="Calibri"/>
               </a:rPr>
-              <a:t>• Metal ions — chelated into complexes</a:t>
-            </a:r>
-          </a:p>
-          <a:p>
-            <a:pPr/>
-            <a:r>
-              <a:rPr sz="1800" b="0">
+              <a:t>Metabolic pathways — reduced efficiency</a:t>
+            </a:r>
+          </a:p>
+          <a:p>
+            <a:pPr>
+              <a:spcAft>
+                <a:spcPts val="900"/>
+              </a:spcAft>
+            </a:pPr>
+            <a:r>
+              <a:rPr sz="1700">
                 <a:solidFill>
-                  <a:srgbClr val="1A1A1A"/>
+                  <a:srgbClr val="3B5A40"/>
                 </a:solidFill>
+                <a:latin typeface="Calibri"/>
               </a:rPr>
-              <a:t>• Net effect on foodborne bacteria</a:t>
+              <a:t>▪  </a:t>
+            </a:r>
+            <a:r>
+              <a:rPr sz="1700">
+                <a:solidFill>
+                  <a:srgbClr val="20261F"/>
+                </a:solidFill>
+                <a:latin typeface="Calibri"/>
+              </a:rPr>
+              <a:t>Metal ions — chelated into complexes</a:t>
+            </a:r>
+          </a:p>
+          <a:p>
+            <a:pPr>
+              <a:spcAft>
+                <a:spcPts val="900"/>
+              </a:spcAft>
+            </a:pPr>
+            <a:r>
+              <a:rPr sz="1700">
+                <a:solidFill>
+                  <a:srgbClr val="3B5A40"/>
+                </a:solidFill>
+                <a:latin typeface="Calibri"/>
+              </a:rPr>
+              <a:t>▪  </a:t>
+            </a:r>
+            <a:r>
+              <a:rPr sz="1700">
+                <a:solidFill>
+                  <a:srgbClr val="20261F"/>
+                </a:solidFill>
+                <a:latin typeface="Calibri"/>
+              </a:rPr>
+              <a:t>Net effect on foodborne bacteria</a:t>
+            </a:r>
+          </a:p>
+        </p:txBody>
+      </p:sp>
+      <p:sp>
+        <p:nvSpPr>
+          <p:cNvPr id="10" name="Rectangle 9"/>
+          <p:cNvSpPr/>
+          <p:nvPr/>
+        </p:nvSpPr>
+        <p:spPr>
+          <a:xfrm>
+            <a:off x="640080" y="6419088"/>
+            <a:ext cx="10908792" cy="11430"/>
+          </a:xfrm>
+          <a:prstGeom prst="rect">
+            <a:avLst/>
+          </a:prstGeom>
+          <a:solidFill>
+            <a:srgbClr val="EEF1EC"/>
+          </a:solidFill>
+          <a:ln>
+            <a:noFill/>
+          </a:ln>
+          <a:effectLst/>
+        </p:spPr>
+        <p:style>
+          <a:lnRef idx="1">
+            <a:schemeClr val="accent1"/>
+          </a:lnRef>
+          <a:fillRef idx="3">
+            <a:schemeClr val="accent1"/>
+          </a:fillRef>
+          <a:effectRef idx="2">
+            <a:schemeClr val="accent1"/>
+          </a:effectRef>
+          <a:fontRef idx="minor">
+            <a:schemeClr val="lt1"/>
+          </a:fontRef>
+        </p:style>
+        <p:txBody>
+          <a:bodyPr rtlCol="0" anchor="ctr"/>
+          <a:lstStyle/>
+          <a:p>
+            <a:pPr algn="ctr"/>
+          </a:p>
+        </p:txBody>
+      </p:sp>
+      <p:sp>
+        <p:nvSpPr>
+          <p:cNvPr id="11" name="TextBox 10"/>
+          <p:cNvSpPr txBox="1"/>
+          <p:nvPr/>
+        </p:nvSpPr>
+        <p:spPr>
+          <a:xfrm>
+            <a:off x="640080" y="6455664"/>
+            <a:ext cx="8229600" cy="320040"/>
+          </a:xfrm>
+          <a:prstGeom prst="rect">
+            <a:avLst/>
+          </a:prstGeom>
+          <a:noFill/>
+        </p:spPr>
+        <p:txBody>
+          <a:bodyPr wrap="square">
+            <a:spAutoFit/>
+          </a:bodyPr>
+          <a:lstStyle/>
+          <a:p>
+            <a:pPr>
+              <a:spcAft>
+                <a:spcPts val="0"/>
+              </a:spcAft>
+            </a:pPr>
+            <a:r>
+              <a:rPr sz="900" b="0">
+                <a:solidFill>
+                  <a:srgbClr val="5C6357"/>
+                </a:solidFill>
+                <a:latin typeface="Calibri"/>
+              </a:rPr>
+              <a:t>Polyphenols · journal club</a:t>
+            </a:r>
+          </a:p>
+        </p:txBody>
+      </p:sp>
+      <p:sp>
+        <p:nvSpPr>
+          <p:cNvPr id="12" name="TextBox 11"/>
+          <p:cNvSpPr txBox="1"/>
+          <p:nvPr/>
+        </p:nvSpPr>
+        <p:spPr>
+          <a:xfrm>
+            <a:off x="10881360" y="6455664"/>
+            <a:ext cx="640080" cy="320040"/>
+          </a:xfrm>
+          <a:prstGeom prst="rect">
+            <a:avLst/>
+          </a:prstGeom>
+          <a:noFill/>
+        </p:spPr>
+        <p:txBody>
+          <a:bodyPr wrap="square">
+            <a:spAutoFit/>
+          </a:bodyPr>
+          <a:lstStyle/>
+          <a:p>
+            <a:pPr algn="r">
+              <a:spcAft>
+                <a:spcPts val="0"/>
+              </a:spcAft>
+            </a:pPr>
+            <a:r>
+              <a:rPr sz="900" b="0">
+                <a:solidFill>
+                  <a:srgbClr val="5C6357"/>
+                </a:solidFill>
+                <a:latin typeface="Calibri"/>
+              </a:rPr>
+              <a:t>5</a:t>
             </a:r>
           </a:p>
         </p:txBody>
@@ -4729,14 +6236,102 @@
       <p:grpSpPr/>
       <p:sp>
         <p:nvSpPr>
-          <p:cNvPr id="2" name="TextBox 1"/>
+          <p:cNvPr id="2" name="Rectangle 1"/>
+          <p:cNvSpPr/>
+          <p:nvPr/>
+        </p:nvSpPr>
+        <p:spPr>
+          <a:xfrm>
+            <a:off x="0" y="0"/>
+            <a:ext cx="12191695" cy="6858000"/>
+          </a:xfrm>
+          <a:prstGeom prst="rect">
+            <a:avLst/>
+          </a:prstGeom>
+          <a:solidFill>
+            <a:srgbClr val="FFFFFF"/>
+          </a:solidFill>
+          <a:ln>
+            <a:noFill/>
+          </a:ln>
+          <a:effectLst/>
+        </p:spPr>
+        <p:style>
+          <a:lnRef idx="1">
+            <a:schemeClr val="accent1"/>
+          </a:lnRef>
+          <a:fillRef idx="3">
+            <a:schemeClr val="accent1"/>
+          </a:fillRef>
+          <a:effectRef idx="2">
+            <a:schemeClr val="accent1"/>
+          </a:effectRef>
+          <a:fontRef idx="minor">
+            <a:schemeClr val="lt1"/>
+          </a:fontRef>
+        </p:style>
+        <p:txBody>
+          <a:bodyPr rtlCol="0" anchor="ctr"/>
+          <a:lstStyle/>
+          <a:p>
+            <a:pPr algn="ctr"/>
+          </a:p>
+        </p:txBody>
+      </p:sp>
+      <p:sp>
+        <p:nvSpPr>
+          <p:cNvPr id="3" name="Rectangle 2"/>
+          <p:cNvSpPr/>
+          <p:nvPr/>
+        </p:nvSpPr>
+        <p:spPr>
+          <a:xfrm>
+            <a:off x="0" y="0"/>
+            <a:ext cx="146304" cy="6858000"/>
+          </a:xfrm>
+          <a:prstGeom prst="rect">
+            <a:avLst/>
+          </a:prstGeom>
+          <a:solidFill>
+            <a:srgbClr val="3B5A40"/>
+          </a:solidFill>
+          <a:ln>
+            <a:noFill/>
+          </a:ln>
+          <a:effectLst/>
+        </p:spPr>
+        <p:style>
+          <a:lnRef idx="1">
+            <a:schemeClr val="accent1"/>
+          </a:lnRef>
+          <a:fillRef idx="3">
+            <a:schemeClr val="accent1"/>
+          </a:fillRef>
+          <a:effectRef idx="2">
+            <a:schemeClr val="accent1"/>
+          </a:effectRef>
+          <a:fontRef idx="minor">
+            <a:schemeClr val="lt1"/>
+          </a:fontRef>
+        </p:style>
+        <p:txBody>
+          <a:bodyPr rtlCol="0" anchor="ctr"/>
+          <a:lstStyle/>
+          <a:p>
+            <a:pPr algn="ctr"/>
+          </a:p>
+        </p:txBody>
+      </p:sp>
+      <p:sp>
+        <p:nvSpPr>
+          <p:cNvPr id="4" name="TextBox 3"/>
           <p:cNvSpPr txBox="1"/>
           <p:nvPr/>
         </p:nvSpPr>
         <p:spPr>
           <a:xfrm>
-            <a:off x="548640" y="365760"/>
-            <a:ext cx="11064240" cy="914400"/>
+            <a:off x="640080" y="384048"/>
+            <a:ext cx="10881360" cy="822960"/>
           </a:xfrm>
           <a:prstGeom prst="rect">
             <a:avLst/>
@@ -4749,29 +6344,78 @@
           </a:bodyPr>
           <a:lstStyle/>
           <a:p>
-            <a:pPr/>
-            <a:r>
-              <a:rPr sz="3000" b="1">
+            <a:pPr>
+              <a:spcAft>
+                <a:spcPts val="600"/>
+              </a:spcAft>
+            </a:pPr>
+            <a:r>
+              <a:rPr sz="2600" b="1">
                 <a:solidFill>
-                  <a:srgbClr val="2F5D62"/>
+                  <a:srgbClr val="3B5A40"/>
                 </a:solidFill>
+                <a:latin typeface="Georgia"/>
               </a:rPr>
               <a:t>Mechanisms at a glance</a:t>
             </a:r>
           </a:p>
         </p:txBody>
       </p:sp>
+      <p:sp>
+        <p:nvSpPr>
+          <p:cNvPr id="5" name="Rectangle 4"/>
+          <p:cNvSpPr/>
+          <p:nvPr/>
+        </p:nvSpPr>
+        <p:spPr>
+          <a:xfrm>
+            <a:off x="658368" y="1170432"/>
+            <a:ext cx="2011680" cy="27940"/>
+          </a:xfrm>
+          <a:prstGeom prst="rect">
+            <a:avLst/>
+          </a:prstGeom>
+          <a:solidFill>
+            <a:srgbClr val="7D9D74"/>
+          </a:solidFill>
+          <a:ln>
+            <a:noFill/>
+          </a:ln>
+          <a:effectLst/>
+        </p:spPr>
+        <p:style>
+          <a:lnRef idx="1">
+            <a:schemeClr val="accent1"/>
+          </a:lnRef>
+          <a:fillRef idx="3">
+            <a:schemeClr val="accent1"/>
+          </a:fillRef>
+          <a:effectRef idx="2">
+            <a:schemeClr val="accent1"/>
+          </a:effectRef>
+          <a:fontRef idx="minor">
+            <a:schemeClr val="lt1"/>
+          </a:fontRef>
+        </p:style>
+        <p:txBody>
+          <a:bodyPr rtlCol="0" anchor="ctr"/>
+          <a:lstStyle/>
+          <a:p>
+            <a:pPr algn="ctr"/>
+          </a:p>
+        </p:txBody>
+      </p:sp>
       <p:graphicFrame>
         <p:nvGraphicFramePr>
-          <p:cNvPr id="3" name="Table 2"/>
+          <p:cNvPr id="6" name="Table 5"/>
           <p:cNvGraphicFramePr>
             <a:graphicFrameLocks noGrp="1"/>
           </p:cNvGraphicFramePr>
           <p:nvPr/>
         </p:nvGraphicFramePr>
         <p:xfrm>
-          <a:off x="640080" y="1554480"/>
-          <a:ext cx="10881360" cy="2194560"/>
+          <a:off x="731520" y="1554480"/>
+          <a:ext cx="10698480" cy="2743200"/>
         </p:xfrm>
         <a:graphic>
           <a:graphicData uri="http://schemas.openxmlformats.org/drawingml/2006/table">
@@ -4780,22 +6424,31 @@
                 <a:tableStyleId>{5C22544A-7EE6-4342-B048-85BDC9FD1C3A}</a:tableStyleId>
               </a:tblPr>
               <a:tblGrid>
-                <a:gridCol w="5440680"/>
-                <a:gridCol w="5440680"/>
+                <a:gridCol w="5349240"/>
+                <a:gridCol w="5349240"/>
               </a:tblGrid>
-              <a:tr h="365760">
+              <a:tr h="457200">
                 <a:tc>
                   <a:txBody>
                     <a:bodyPr/>
                     <a:lstStyle/>
                     <a:p>
                       <a:r>
-                        <a:rPr sz="1200" b="1"/>
+                        <a:rPr sz="1200" b="1">
+                          <a:solidFill>
+                            <a:srgbClr val="FFFFFF"/>
+                          </a:solidFill>
+                          <a:latin typeface="Calibri"/>
+                        </a:rPr>
                         <a:t>Target of polyphenols</a:t>
                       </a:r>
                     </a:p>
                   </a:txBody>
-                  <a:tcPr/>
+                  <a:tcPr>
+                    <a:solidFill>
+                      <a:srgbClr val="3B5A40"/>
+                    </a:solidFill>
+                  </a:tcPr>
                 </a:tc>
                 <a:tc>
                   <a:txBody>
@@ -4803,27 +6456,45 @@
                     <a:lstStyle/>
                     <a:p>
                       <a:r>
-                        <a:rPr sz="1200" b="1"/>
+                        <a:rPr sz="1200" b="1">
+                          <a:solidFill>
+                            <a:srgbClr val="FFFFFF"/>
+                          </a:solidFill>
+                          <a:latin typeface="Calibri"/>
+                        </a:rPr>
                         <a:t>Consequence for foodborne bacteria</a:t>
                       </a:r>
                     </a:p>
                   </a:txBody>
-                  <a:tcPr/>
+                  <a:tcPr>
+                    <a:solidFill>
+                      <a:srgbClr val="3B5A40"/>
+                    </a:solidFill>
+                  </a:tcPr>
                 </a:tc>
               </a:tr>
-              <a:tr h="365760">
+              <a:tr h="457200">
                 <a:tc>
                   <a:txBody>
                     <a:bodyPr/>
                     <a:lstStyle/>
                     <a:p>
                       <a:r>
-                        <a:rPr sz="1200" b="0"/>
+                        <a:rPr sz="1200" b="0">
+                          <a:solidFill>
+                            <a:srgbClr val="20261F"/>
+                          </a:solidFill>
+                          <a:latin typeface="Calibri"/>
+                        </a:rPr>
                         <a:t>Cell membrane</a:t>
                       </a:r>
                     </a:p>
                   </a:txBody>
-                  <a:tcPr/>
+                  <a:tcPr>
+                    <a:solidFill>
+                      <a:srgbClr val="F4F7F1"/>
+                    </a:solidFill>
+                  </a:tcPr>
                 </a:tc>
                 <a:tc>
                   <a:txBody>
@@ -4831,27 +6502,45 @@
                     <a:lstStyle/>
                     <a:p>
                       <a:r>
-                        <a:rPr sz="1200" b="0"/>
+                        <a:rPr sz="1200" b="0">
+                          <a:solidFill>
+                            <a:srgbClr val="20261F"/>
+                          </a:solidFill>
+                          <a:latin typeface="Calibri"/>
+                        </a:rPr>
                         <a:t>Destructive damage</a:t>
                       </a:r>
                     </a:p>
                   </a:txBody>
-                  <a:tcPr/>
+                  <a:tcPr>
+                    <a:solidFill>
+                      <a:srgbClr val="F4F7F1"/>
+                    </a:solidFill>
+                  </a:tcPr>
                 </a:tc>
               </a:tr>
-              <a:tr h="365760">
+              <a:tr h="457200">
                 <a:tc>
                   <a:txBody>
                     <a:bodyPr/>
                     <a:lstStyle/>
                     <a:p>
                       <a:r>
-                        <a:rPr sz="1200" b="0"/>
+                        <a:rPr sz="1200" b="0">
+                          <a:solidFill>
+                            <a:srgbClr val="20261F"/>
+                          </a:solidFill>
+                          <a:latin typeface="Calibri"/>
+                        </a:rPr>
                         <a:t>Proteins</a:t>
                       </a:r>
                     </a:p>
                   </a:txBody>
-                  <a:tcPr/>
+                  <a:tcPr>
+                    <a:solidFill>
+                      <a:srgbClr val="FFFFFF"/>
+                    </a:solidFill>
+                  </a:tcPr>
                 </a:tc>
                 <a:tc>
                   <a:txBody>
@@ -4859,27 +6548,45 @@
                     <a:lstStyle/>
                     <a:p>
                       <a:r>
-                        <a:rPr sz="1200" b="0"/>
+                        <a:rPr sz="1200" b="0">
+                          <a:solidFill>
+                            <a:srgbClr val="20261F"/>
+                          </a:solidFill>
+                          <a:latin typeface="Calibri"/>
+                        </a:rPr>
                         <a:t>Function impaired / harmed</a:t>
                       </a:r>
                     </a:p>
                   </a:txBody>
-                  <a:tcPr/>
+                  <a:tcPr>
+                    <a:solidFill>
+                      <a:srgbClr val="FFFFFF"/>
+                    </a:solidFill>
+                  </a:tcPr>
                 </a:tc>
               </a:tr>
-              <a:tr h="365760">
+              <a:tr h="457200">
                 <a:tc>
                   <a:txBody>
                     <a:bodyPr/>
                     <a:lstStyle/>
                     <a:p>
                       <a:r>
-                        <a:rPr sz="1200" b="0"/>
+                        <a:rPr sz="1200" b="0">
+                          <a:solidFill>
+                            <a:srgbClr val="20261F"/>
+                          </a:solidFill>
+                          <a:latin typeface="Calibri"/>
+                        </a:rPr>
                         <a:t>Nucleic acids</a:t>
                       </a:r>
                     </a:p>
                   </a:txBody>
-                  <a:tcPr/>
+                  <a:tcPr>
+                    <a:solidFill>
+                      <a:srgbClr val="F4F7F1"/>
+                    </a:solidFill>
+                  </a:tcPr>
                 </a:tc>
                 <a:tc>
                   <a:txBody>
@@ -4887,27 +6594,45 @@
                     <a:lstStyle/>
                     <a:p>
                       <a:r>
-                        <a:rPr sz="1200" b="0"/>
+                        <a:rPr sz="1200" b="0">
+                          <a:solidFill>
+                            <a:srgbClr val="20261F"/>
+                          </a:solidFill>
+                          <a:latin typeface="Calibri"/>
+                        </a:rPr>
                         <a:t>Harmed</a:t>
                       </a:r>
                     </a:p>
                   </a:txBody>
-                  <a:tcPr/>
+                  <a:tcPr>
+                    <a:solidFill>
+                      <a:srgbClr val="F4F7F1"/>
+                    </a:solidFill>
+                  </a:tcPr>
                 </a:tc>
               </a:tr>
-              <a:tr h="365760">
+              <a:tr h="457200">
                 <a:tc>
                   <a:txBody>
                     <a:bodyPr/>
                     <a:lstStyle/>
                     <a:p>
                       <a:r>
-                        <a:rPr sz="1200" b="0"/>
+                        <a:rPr sz="1200" b="0">
+                          <a:solidFill>
+                            <a:srgbClr val="20261F"/>
+                          </a:solidFill>
+                          <a:latin typeface="Calibri"/>
+                        </a:rPr>
                         <a:t>Metabolic pathways</a:t>
                       </a:r>
                     </a:p>
                   </a:txBody>
-                  <a:tcPr/>
+                  <a:tcPr>
+                    <a:solidFill>
+                      <a:srgbClr val="FFFFFF"/>
+                    </a:solidFill>
+                  </a:tcPr>
                 </a:tc>
                 <a:tc>
                   <a:txBody>
@@ -4915,27 +6640,45 @@
                     <a:lstStyle/>
                     <a:p>
                       <a:r>
-                        <a:rPr sz="1200" b="0"/>
+                        <a:rPr sz="1200" b="0">
+                          <a:solidFill>
+                            <a:srgbClr val="20261F"/>
+                          </a:solidFill>
+                          <a:latin typeface="Calibri"/>
+                        </a:rPr>
                         <a:t>Reduced efficiency</a:t>
                       </a:r>
                     </a:p>
                   </a:txBody>
-                  <a:tcPr/>
+                  <a:tcPr>
+                    <a:solidFill>
+                      <a:srgbClr val="FFFFFF"/>
+                    </a:solidFill>
+                  </a:tcPr>
                 </a:tc>
               </a:tr>
-              <a:tr h="365760">
+              <a:tr h="457200">
                 <a:tc>
                   <a:txBody>
                     <a:bodyPr/>
                     <a:lstStyle/>
                     <a:p>
                       <a:r>
-                        <a:rPr sz="1200" b="0"/>
+                        <a:rPr sz="1200" b="0">
+                          <a:solidFill>
+                            <a:srgbClr val="20261F"/>
+                          </a:solidFill>
+                          <a:latin typeface="Calibri"/>
+                        </a:rPr>
                         <a:t>Metal ions</a:t>
                       </a:r>
                     </a:p>
                   </a:txBody>
-                  <a:tcPr/>
+                  <a:tcPr>
+                    <a:solidFill>
+                      <a:srgbClr val="F4F7F1"/>
+                    </a:solidFill>
+                  </a:tcPr>
                 </a:tc>
                 <a:tc>
                   <a:txBody>
@@ -4943,18 +6686,149 @@
                     <a:lstStyle/>
                     <a:p>
                       <a:r>
-                        <a:rPr sz="1200" b="0"/>
+                        <a:rPr sz="1200" b="0">
+                          <a:solidFill>
+                            <a:srgbClr val="20261F"/>
+                          </a:solidFill>
+                          <a:latin typeface="Calibri"/>
+                        </a:rPr>
                         <a:t>Chelated into complexes (amplifies activity)</a:t>
                       </a:r>
                     </a:p>
                   </a:txBody>
-                  <a:tcPr/>
+                  <a:tcPr>
+                    <a:solidFill>
+                      <a:srgbClr val="F4F7F1"/>
+                    </a:solidFill>
+                  </a:tcPr>
                 </a:tc>
               </a:tr>
             </a:tbl>
           </a:graphicData>
         </a:graphic>
       </p:graphicFrame>
+      <p:sp>
+        <p:nvSpPr>
+          <p:cNvPr id="7" name="Rectangle 6"/>
+          <p:cNvSpPr/>
+          <p:nvPr/>
+        </p:nvSpPr>
+        <p:spPr>
+          <a:xfrm>
+            <a:off x="640080" y="6419088"/>
+            <a:ext cx="10908792" cy="11430"/>
+          </a:xfrm>
+          <a:prstGeom prst="rect">
+            <a:avLst/>
+          </a:prstGeom>
+          <a:solidFill>
+            <a:srgbClr val="EEF1EC"/>
+          </a:solidFill>
+          <a:ln>
+            <a:noFill/>
+          </a:ln>
+          <a:effectLst/>
+        </p:spPr>
+        <p:style>
+          <a:lnRef idx="1">
+            <a:schemeClr val="accent1"/>
+          </a:lnRef>
+          <a:fillRef idx="3">
+            <a:schemeClr val="accent1"/>
+          </a:fillRef>
+          <a:effectRef idx="2">
+            <a:schemeClr val="accent1"/>
+          </a:effectRef>
+          <a:fontRef idx="minor">
+            <a:schemeClr val="lt1"/>
+          </a:fontRef>
+        </p:style>
+        <p:txBody>
+          <a:bodyPr rtlCol="0" anchor="ctr"/>
+          <a:lstStyle/>
+          <a:p>
+            <a:pPr algn="ctr"/>
+          </a:p>
+        </p:txBody>
+      </p:sp>
+      <p:sp>
+        <p:nvSpPr>
+          <p:cNvPr id="8" name="TextBox 7"/>
+          <p:cNvSpPr txBox="1"/>
+          <p:nvPr/>
+        </p:nvSpPr>
+        <p:spPr>
+          <a:xfrm>
+            <a:off x="640080" y="6455664"/>
+            <a:ext cx="8229600" cy="320040"/>
+          </a:xfrm>
+          <a:prstGeom prst="rect">
+            <a:avLst/>
+          </a:prstGeom>
+          <a:noFill/>
+        </p:spPr>
+        <p:txBody>
+          <a:bodyPr wrap="square">
+            <a:spAutoFit/>
+          </a:bodyPr>
+          <a:lstStyle/>
+          <a:p>
+            <a:pPr>
+              <a:spcAft>
+                <a:spcPts val="0"/>
+              </a:spcAft>
+            </a:pPr>
+            <a:r>
+              <a:rPr sz="900" b="0">
+                <a:solidFill>
+                  <a:srgbClr val="5C6357"/>
+                </a:solidFill>
+                <a:latin typeface="Calibri"/>
+              </a:rPr>
+              <a:t>Polyphenols · journal club</a:t>
+            </a:r>
+          </a:p>
+        </p:txBody>
+      </p:sp>
+      <p:sp>
+        <p:nvSpPr>
+          <p:cNvPr id="9" name="TextBox 8"/>
+          <p:cNvSpPr txBox="1"/>
+          <p:nvPr/>
+        </p:nvSpPr>
+        <p:spPr>
+          <a:xfrm>
+            <a:off x="10881360" y="6455664"/>
+            <a:ext cx="640080" cy="320040"/>
+          </a:xfrm>
+          <a:prstGeom prst="rect">
+            <a:avLst/>
+          </a:prstGeom>
+          <a:noFill/>
+        </p:spPr>
+        <p:txBody>
+          <a:bodyPr wrap="square">
+            <a:spAutoFit/>
+          </a:bodyPr>
+          <a:lstStyle/>
+          <a:p>
+            <a:pPr algn="r">
+              <a:spcAft>
+                <a:spcPts val="0"/>
+              </a:spcAft>
+            </a:pPr>
+            <a:r>
+              <a:rPr sz="900" b="0">
+                <a:solidFill>
+                  <a:srgbClr val="5C6357"/>
+                </a:solidFill>
+                <a:latin typeface="Calibri"/>
+              </a:rPr>
+              <a:t>6</a:t>
+            </a:r>
+          </a:p>
+        </p:txBody>
+      </p:sp>
     </p:spTree>
   </p:cSld>
   <p:clrMapOvr>
@@ -4975,14 +6849,102 @@
       <p:grpSpPr/>
       <p:sp>
         <p:nvSpPr>
-          <p:cNvPr id="2" name="TextBox 1"/>
+          <p:cNvPr id="2" name="Rectangle 1"/>
+          <p:cNvSpPr/>
+          <p:nvPr/>
+        </p:nvSpPr>
+        <p:spPr>
+          <a:xfrm>
+            <a:off x="0" y="0"/>
+            <a:ext cx="12191695" cy="6858000"/>
+          </a:xfrm>
+          <a:prstGeom prst="rect">
+            <a:avLst/>
+          </a:prstGeom>
+          <a:solidFill>
+            <a:srgbClr val="FFFFFF"/>
+          </a:solidFill>
+          <a:ln>
+            <a:noFill/>
+          </a:ln>
+          <a:effectLst/>
+        </p:spPr>
+        <p:style>
+          <a:lnRef idx="1">
+            <a:schemeClr val="accent1"/>
+          </a:lnRef>
+          <a:fillRef idx="3">
+            <a:schemeClr val="accent1"/>
+          </a:fillRef>
+          <a:effectRef idx="2">
+            <a:schemeClr val="accent1"/>
+          </a:effectRef>
+          <a:fontRef idx="minor">
+            <a:schemeClr val="lt1"/>
+          </a:fontRef>
+        </p:style>
+        <p:txBody>
+          <a:bodyPr rtlCol="0" anchor="ctr"/>
+          <a:lstStyle/>
+          <a:p>
+            <a:pPr algn="ctr"/>
+          </a:p>
+        </p:txBody>
+      </p:sp>
+      <p:sp>
+        <p:nvSpPr>
+          <p:cNvPr id="3" name="Rectangle 2"/>
+          <p:cNvSpPr/>
+          <p:nvPr/>
+        </p:nvSpPr>
+        <p:spPr>
+          <a:xfrm>
+            <a:off x="0" y="0"/>
+            <a:ext cx="146304" cy="6858000"/>
+          </a:xfrm>
+          <a:prstGeom prst="rect">
+            <a:avLst/>
+          </a:prstGeom>
+          <a:solidFill>
+            <a:srgbClr val="3B5A40"/>
+          </a:solidFill>
+          <a:ln>
+            <a:noFill/>
+          </a:ln>
+          <a:effectLst/>
+        </p:spPr>
+        <p:style>
+          <a:lnRef idx="1">
+            <a:schemeClr val="accent1"/>
+          </a:lnRef>
+          <a:fillRef idx="3">
+            <a:schemeClr val="accent1"/>
+          </a:fillRef>
+          <a:effectRef idx="2">
+            <a:schemeClr val="accent1"/>
+          </a:effectRef>
+          <a:fontRef idx="minor">
+            <a:schemeClr val="lt1"/>
+          </a:fontRef>
+        </p:style>
+        <p:txBody>
+          <a:bodyPr rtlCol="0" anchor="ctr"/>
+          <a:lstStyle/>
+          <a:p>
+            <a:pPr algn="ctr"/>
+          </a:p>
+        </p:txBody>
+      </p:sp>
+      <p:sp>
+        <p:nvSpPr>
+          <p:cNvPr id="4" name="TextBox 3"/>
           <p:cNvSpPr txBox="1"/>
           <p:nvPr/>
         </p:nvSpPr>
         <p:spPr>
           <a:xfrm>
-            <a:off x="548640" y="365760"/>
-            <a:ext cx="11064240" cy="914400"/>
+            <a:off x="640080" y="384048"/>
+            <a:ext cx="10881360" cy="822960"/>
           </a:xfrm>
           <a:prstGeom prst="rect">
             <a:avLst/>
@@ -4995,12 +6957,17 @@
           </a:bodyPr>
           <a:lstStyle/>
           <a:p>
-            <a:pPr/>
-            <a:r>
-              <a:rPr sz="3000" b="1">
+            <a:pPr>
+              <a:spcAft>
+                <a:spcPts val="600"/>
+              </a:spcAft>
+            </a:pPr>
+            <a:r>
+              <a:rPr sz="2600" b="1">
                 <a:solidFill>
-                  <a:srgbClr val="2F5D62"/>
+                  <a:srgbClr val="3B5A40"/>
                 </a:solidFill>
+                <a:latin typeface="Georgia"/>
               </a:rPr>
               <a:t>Structure determines mechanism</a:t>
             </a:r>
@@ -5009,14 +6976,58 @@
       </p:sp>
       <p:sp>
         <p:nvSpPr>
-          <p:cNvPr id="3" name="TextBox 2"/>
+          <p:cNvPr id="5" name="Rectangle 4"/>
+          <p:cNvSpPr/>
+          <p:nvPr/>
+        </p:nvSpPr>
+        <p:spPr>
+          <a:xfrm>
+            <a:off x="658368" y="1170432"/>
+            <a:ext cx="2011680" cy="27940"/>
+          </a:xfrm>
+          <a:prstGeom prst="rect">
+            <a:avLst/>
+          </a:prstGeom>
+          <a:solidFill>
+            <a:srgbClr val="7D9D74"/>
+          </a:solidFill>
+          <a:ln>
+            <a:noFill/>
+          </a:ln>
+          <a:effectLst/>
+        </p:spPr>
+        <p:style>
+          <a:lnRef idx="1">
+            <a:schemeClr val="accent1"/>
+          </a:lnRef>
+          <a:fillRef idx="3">
+            <a:schemeClr val="accent1"/>
+          </a:fillRef>
+          <a:effectRef idx="2">
+            <a:schemeClr val="accent1"/>
+          </a:effectRef>
+          <a:fontRef idx="minor">
+            <a:schemeClr val="lt1"/>
+          </a:fontRef>
+        </p:style>
+        <p:txBody>
+          <a:bodyPr rtlCol="0" anchor="ctr"/>
+          <a:lstStyle/>
+          <a:p>
+            <a:pPr algn="ctr"/>
+          </a:p>
+        </p:txBody>
+      </p:sp>
+      <p:sp>
+        <p:nvSpPr>
+          <p:cNvPr id="6" name="TextBox 5"/>
           <p:cNvSpPr txBox="1"/>
           <p:nvPr/>
         </p:nvSpPr>
         <p:spPr>
           <a:xfrm>
-            <a:off x="640080" y="1463040"/>
-            <a:ext cx="10881360" cy="4937760"/>
+            <a:off x="731520" y="1463040"/>
+            <a:ext cx="10789920" cy="4754880"/>
           </a:xfrm>
           <a:prstGeom prst="rect">
             <a:avLst/>
@@ -5029,36 +7040,200 @@
           </a:bodyPr>
           <a:lstStyle/>
           <a:p>
-            <a:pPr/>
-            <a:r>
-              <a:rPr sz="1800" b="0">
+            <a:pPr>
+              <a:spcAft>
+                <a:spcPts val="900"/>
+              </a:spcAft>
+            </a:pPr>
+            <a:r>
+              <a:rPr sz="1800">
                 <a:solidFill>
-                  <a:srgbClr val="1A1A1A"/>
+                  <a:srgbClr val="3B5A40"/>
                 </a:solidFill>
+                <a:latin typeface="Calibri"/>
               </a:rPr>
-              <a:t>• Narrative review of polyphenol–foodborne-pathogen interactions</a:t>
-            </a:r>
-          </a:p>
-          <a:p>
-            <a:pPr/>
-            <a:r>
-              <a:rPr sz="1800" b="0">
+              <a:t>▪  </a:t>
+            </a:r>
+            <a:r>
+              <a:rPr sz="1800">
                 <a:solidFill>
-                  <a:srgbClr val="1A1A1A"/>
+                  <a:srgbClr val="20261F"/>
                 </a:solidFill>
+                <a:latin typeface="Calibri"/>
               </a:rPr>
-              <a:t>• Correlates chemical structure with mechanism of action</a:t>
-            </a:r>
-          </a:p>
-          <a:p>
-            <a:pPr/>
-            <a:r>
-              <a:rPr sz="1800" b="0">
+              <a:t>Narrative review of polyphenol–foodborne-pathogen interactions</a:t>
+            </a:r>
+          </a:p>
+          <a:p>
+            <a:pPr>
+              <a:spcAft>
+                <a:spcPts val="900"/>
+              </a:spcAft>
+            </a:pPr>
+            <a:r>
+              <a:rPr sz="1800">
                 <a:solidFill>
-                  <a:srgbClr val="1A1A1A"/>
+                  <a:srgbClr val="3B5A40"/>
                 </a:solidFill>
+                <a:latin typeface="Calibri"/>
               </a:rPr>
-              <a:t>• Multifaceted rather than a single mode of action</a:t>
+              <a:t>▪  </a:t>
+            </a:r>
+            <a:r>
+              <a:rPr sz="1800">
+                <a:solidFill>
+                  <a:srgbClr val="20261F"/>
+                </a:solidFill>
+                <a:latin typeface="Calibri"/>
+              </a:rPr>
+              <a:t>Correlates chemical structure with mechanism of action</a:t>
+            </a:r>
+          </a:p>
+          <a:p>
+            <a:pPr>
+              <a:spcAft>
+                <a:spcPts val="900"/>
+              </a:spcAft>
+            </a:pPr>
+            <a:r>
+              <a:rPr sz="1800">
+                <a:solidFill>
+                  <a:srgbClr val="3B5A40"/>
+                </a:solidFill>
+                <a:latin typeface="Calibri"/>
+              </a:rPr>
+              <a:t>▪  </a:t>
+            </a:r>
+            <a:r>
+              <a:rPr sz="1800">
+                <a:solidFill>
+                  <a:srgbClr val="20261F"/>
+                </a:solidFill>
+                <a:latin typeface="Calibri"/>
+              </a:rPr>
+              <a:t>Multifaceted rather than a single mode of action</a:t>
+            </a:r>
+          </a:p>
+        </p:txBody>
+      </p:sp>
+      <p:sp>
+        <p:nvSpPr>
+          <p:cNvPr id="7" name="Rectangle 6"/>
+          <p:cNvSpPr/>
+          <p:nvPr/>
+        </p:nvSpPr>
+        <p:spPr>
+          <a:xfrm>
+            <a:off x="640080" y="6419088"/>
+            <a:ext cx="10908792" cy="11430"/>
+          </a:xfrm>
+          <a:prstGeom prst="rect">
+            <a:avLst/>
+          </a:prstGeom>
+          <a:solidFill>
+            <a:srgbClr val="EEF1EC"/>
+          </a:solidFill>
+          <a:ln>
+            <a:noFill/>
+          </a:ln>
+          <a:effectLst/>
+        </p:spPr>
+        <p:style>
+          <a:lnRef idx="1">
+            <a:schemeClr val="accent1"/>
+          </a:lnRef>
+          <a:fillRef idx="3">
+            <a:schemeClr val="accent1"/>
+          </a:fillRef>
+          <a:effectRef idx="2">
+            <a:schemeClr val="accent1"/>
+          </a:effectRef>
+          <a:fontRef idx="minor">
+            <a:schemeClr val="lt1"/>
+          </a:fontRef>
+        </p:style>
+        <p:txBody>
+          <a:bodyPr rtlCol="0" anchor="ctr"/>
+          <a:lstStyle/>
+          <a:p>
+            <a:pPr algn="ctr"/>
+          </a:p>
+        </p:txBody>
+      </p:sp>
+      <p:sp>
+        <p:nvSpPr>
+          <p:cNvPr id="8" name="TextBox 7"/>
+          <p:cNvSpPr txBox="1"/>
+          <p:nvPr/>
+        </p:nvSpPr>
+        <p:spPr>
+          <a:xfrm>
+            <a:off x="640080" y="6455664"/>
+            <a:ext cx="8229600" cy="320040"/>
+          </a:xfrm>
+          <a:prstGeom prst="rect">
+            <a:avLst/>
+          </a:prstGeom>
+          <a:noFill/>
+        </p:spPr>
+        <p:txBody>
+          <a:bodyPr wrap="square">
+            <a:spAutoFit/>
+          </a:bodyPr>
+          <a:lstStyle/>
+          <a:p>
+            <a:pPr>
+              <a:spcAft>
+                <a:spcPts val="0"/>
+              </a:spcAft>
+            </a:pPr>
+            <a:r>
+              <a:rPr sz="900" b="0">
+                <a:solidFill>
+                  <a:srgbClr val="5C6357"/>
+                </a:solidFill>
+                <a:latin typeface="Calibri"/>
+              </a:rPr>
+              <a:t>Polyphenols · journal club</a:t>
+            </a:r>
+          </a:p>
+        </p:txBody>
+      </p:sp>
+      <p:sp>
+        <p:nvSpPr>
+          <p:cNvPr id="9" name="TextBox 8"/>
+          <p:cNvSpPr txBox="1"/>
+          <p:nvPr/>
+        </p:nvSpPr>
+        <p:spPr>
+          <a:xfrm>
+            <a:off x="10881360" y="6455664"/>
+            <a:ext cx="640080" cy="320040"/>
+          </a:xfrm>
+          <a:prstGeom prst="rect">
+            <a:avLst/>
+          </a:prstGeom>
+          <a:noFill/>
+        </p:spPr>
+        <p:txBody>
+          <a:bodyPr wrap="square">
+            <a:spAutoFit/>
+          </a:bodyPr>
+          <a:lstStyle/>
+          <a:p>
+            <a:pPr algn="r">
+              <a:spcAft>
+                <a:spcPts val="0"/>
+              </a:spcAft>
+            </a:pPr>
+            <a:r>
+              <a:rPr sz="900" b="0">
+                <a:solidFill>
+                  <a:srgbClr val="5C6357"/>
+                </a:solidFill>
+                <a:latin typeface="Calibri"/>
+              </a:rPr>
+              <a:t>7</a:t>
             </a:r>
           </a:p>
         </p:txBody>
@@ -5083,14 +7258,102 @@
       <p:grpSpPr/>
       <p:sp>
         <p:nvSpPr>
-          <p:cNvPr id="2" name="TextBox 1"/>
+          <p:cNvPr id="2" name="Rectangle 1"/>
+          <p:cNvSpPr/>
+          <p:nvPr/>
+        </p:nvSpPr>
+        <p:spPr>
+          <a:xfrm>
+            <a:off x="0" y="0"/>
+            <a:ext cx="12191695" cy="6858000"/>
+          </a:xfrm>
+          <a:prstGeom prst="rect">
+            <a:avLst/>
+          </a:prstGeom>
+          <a:solidFill>
+            <a:srgbClr val="FFFFFF"/>
+          </a:solidFill>
+          <a:ln>
+            <a:noFill/>
+          </a:ln>
+          <a:effectLst/>
+        </p:spPr>
+        <p:style>
+          <a:lnRef idx="1">
+            <a:schemeClr val="accent1"/>
+          </a:lnRef>
+          <a:fillRef idx="3">
+            <a:schemeClr val="accent1"/>
+          </a:fillRef>
+          <a:effectRef idx="2">
+            <a:schemeClr val="accent1"/>
+          </a:effectRef>
+          <a:fontRef idx="minor">
+            <a:schemeClr val="lt1"/>
+          </a:fontRef>
+        </p:style>
+        <p:txBody>
+          <a:bodyPr rtlCol="0" anchor="ctr"/>
+          <a:lstStyle/>
+          <a:p>
+            <a:pPr algn="ctr"/>
+          </a:p>
+        </p:txBody>
+      </p:sp>
+      <p:sp>
+        <p:nvSpPr>
+          <p:cNvPr id="3" name="Rectangle 2"/>
+          <p:cNvSpPr/>
+          <p:nvPr/>
+        </p:nvSpPr>
+        <p:spPr>
+          <a:xfrm>
+            <a:off x="0" y="0"/>
+            <a:ext cx="146304" cy="6858000"/>
+          </a:xfrm>
+          <a:prstGeom prst="rect">
+            <a:avLst/>
+          </a:prstGeom>
+          <a:solidFill>
+            <a:srgbClr val="3B5A40"/>
+          </a:solidFill>
+          <a:ln>
+            <a:noFill/>
+          </a:ln>
+          <a:effectLst/>
+        </p:spPr>
+        <p:style>
+          <a:lnRef idx="1">
+            <a:schemeClr val="accent1"/>
+          </a:lnRef>
+          <a:fillRef idx="3">
+            <a:schemeClr val="accent1"/>
+          </a:fillRef>
+          <a:effectRef idx="2">
+            <a:schemeClr val="accent1"/>
+          </a:effectRef>
+          <a:fontRef idx="minor">
+            <a:schemeClr val="lt1"/>
+          </a:fontRef>
+        </p:style>
+        <p:txBody>
+          <a:bodyPr rtlCol="0" anchor="ctr"/>
+          <a:lstStyle/>
+          <a:p>
+            <a:pPr algn="ctr"/>
+          </a:p>
+        </p:txBody>
+      </p:sp>
+      <p:sp>
+        <p:nvSpPr>
+          <p:cNvPr id="4" name="TextBox 3"/>
           <p:cNvSpPr txBox="1"/>
           <p:nvPr/>
         </p:nvSpPr>
         <p:spPr>
           <a:xfrm>
-            <a:off x="548640" y="365760"/>
-            <a:ext cx="11064240" cy="914400"/>
+            <a:off x="640080" y="384048"/>
+            <a:ext cx="10881360" cy="822960"/>
           </a:xfrm>
           <a:prstGeom prst="rect">
             <a:avLst/>
@@ -5103,12 +7366,17 @@
           </a:bodyPr>
           <a:lstStyle/>
           <a:p>
-            <a:pPr/>
-            <a:r>
-              <a:rPr sz="3000" b="1">
+            <a:pPr>
+              <a:spcAft>
+                <a:spcPts val="600"/>
+              </a:spcAft>
+            </a:pPr>
+            <a:r>
+              <a:rPr sz="2600" b="1">
                 <a:solidFill>
-                  <a:srgbClr val="2F5D62"/>
+                  <a:srgbClr val="3B5A40"/>
                 </a:solidFill>
+                <a:latin typeface="Georgia"/>
               </a:rPr>
               <a:t>Implication: natural preservatives</a:t>
             </a:r>
@@ -5117,14 +7385,58 @@
       </p:sp>
       <p:sp>
         <p:nvSpPr>
-          <p:cNvPr id="3" name="TextBox 2"/>
+          <p:cNvPr id="5" name="Rectangle 4"/>
+          <p:cNvSpPr/>
+          <p:nvPr/>
+        </p:nvSpPr>
+        <p:spPr>
+          <a:xfrm>
+            <a:off x="658368" y="1170432"/>
+            <a:ext cx="2011680" cy="27940"/>
+          </a:xfrm>
+          <a:prstGeom prst="rect">
+            <a:avLst/>
+          </a:prstGeom>
+          <a:solidFill>
+            <a:srgbClr val="7D9D74"/>
+          </a:solidFill>
+          <a:ln>
+            <a:noFill/>
+          </a:ln>
+          <a:effectLst/>
+        </p:spPr>
+        <p:style>
+          <a:lnRef idx="1">
+            <a:schemeClr val="accent1"/>
+          </a:lnRef>
+          <a:fillRef idx="3">
+            <a:schemeClr val="accent1"/>
+          </a:fillRef>
+          <a:effectRef idx="2">
+            <a:schemeClr val="accent1"/>
+          </a:effectRef>
+          <a:fontRef idx="minor">
+            <a:schemeClr val="lt1"/>
+          </a:fontRef>
+        </p:style>
+        <p:txBody>
+          <a:bodyPr rtlCol="0" anchor="ctr"/>
+          <a:lstStyle/>
+          <a:p>
+            <a:pPr algn="ctr"/>
+          </a:p>
+        </p:txBody>
+      </p:sp>
+      <p:sp>
+        <p:nvSpPr>
+          <p:cNvPr id="6" name="TextBox 5"/>
           <p:cNvSpPr txBox="1"/>
           <p:nvPr/>
         </p:nvSpPr>
         <p:spPr>
           <a:xfrm>
-            <a:off x="640080" y="1463040"/>
-            <a:ext cx="10881360" cy="4937760"/>
+            <a:off x="731520" y="1463040"/>
+            <a:ext cx="10789920" cy="4754880"/>
           </a:xfrm>
           <a:prstGeom prst="rect">
             <a:avLst/>
@@ -5137,25 +7449,175 @@
           </a:bodyPr>
           <a:lstStyle/>
           <a:p>
-            <a:pPr/>
-            <a:r>
-              <a:rPr sz="1800" b="0">
+            <a:pPr>
+              <a:spcAft>
+                <a:spcPts val="900"/>
+              </a:spcAft>
+            </a:pPr>
+            <a:r>
+              <a:rPr sz="1800">
                 <a:solidFill>
-                  <a:srgbClr val="1A1A1A"/>
+                  <a:srgbClr val="3B5A40"/>
                 </a:solidFill>
+                <a:latin typeface="Calibri"/>
               </a:rPr>
-              <a:t>• Potential as innovative natural preservatives in food systems</a:t>
-            </a:r>
-          </a:p>
-          <a:p>
-            <a:pPr/>
-            <a:r>
-              <a:rPr sz="1800" b="0">
+              <a:t>▪  </a:t>
+            </a:r>
+            <a:r>
+              <a:rPr sz="1800">
                 <a:solidFill>
-                  <a:srgbClr val="1A1A1A"/>
+                  <a:srgbClr val="20261F"/>
                 </a:solidFill>
+                <a:latin typeface="Calibri"/>
               </a:rPr>
-              <a:t>• Eco-friendly, sustainable alternative to synthetic additives</a:t>
+              <a:t>Potential as innovative natural preservatives in food systems</a:t>
+            </a:r>
+          </a:p>
+          <a:p>
+            <a:pPr>
+              <a:spcAft>
+                <a:spcPts val="900"/>
+              </a:spcAft>
+            </a:pPr>
+            <a:r>
+              <a:rPr sz="1800">
+                <a:solidFill>
+                  <a:srgbClr val="3B5A40"/>
+                </a:solidFill>
+                <a:latin typeface="Calibri"/>
+              </a:rPr>
+              <a:t>▪  </a:t>
+            </a:r>
+            <a:r>
+              <a:rPr sz="1800">
+                <a:solidFill>
+                  <a:srgbClr val="20261F"/>
+                </a:solidFill>
+                <a:latin typeface="Calibri"/>
+              </a:rPr>
+              <a:t>Eco-friendly, sustainable alternative to synthetic additives</a:t>
+            </a:r>
+          </a:p>
+        </p:txBody>
+      </p:sp>
+      <p:sp>
+        <p:nvSpPr>
+          <p:cNvPr id="7" name="Rectangle 6"/>
+          <p:cNvSpPr/>
+          <p:nvPr/>
+        </p:nvSpPr>
+        <p:spPr>
+          <a:xfrm>
+            <a:off x="640080" y="6419088"/>
+            <a:ext cx="10908792" cy="11430"/>
+          </a:xfrm>
+          <a:prstGeom prst="rect">
+            <a:avLst/>
+          </a:prstGeom>
+          <a:solidFill>
+            <a:srgbClr val="EEF1EC"/>
+          </a:solidFill>
+          <a:ln>
+            <a:noFill/>
+          </a:ln>
+          <a:effectLst/>
+        </p:spPr>
+        <p:style>
+          <a:lnRef idx="1">
+            <a:schemeClr val="accent1"/>
+          </a:lnRef>
+          <a:fillRef idx="3">
+            <a:schemeClr val="accent1"/>
+          </a:fillRef>
+          <a:effectRef idx="2">
+            <a:schemeClr val="accent1"/>
+          </a:effectRef>
+          <a:fontRef idx="minor">
+            <a:schemeClr val="lt1"/>
+          </a:fontRef>
+        </p:style>
+        <p:txBody>
+          <a:bodyPr rtlCol="0" anchor="ctr"/>
+          <a:lstStyle/>
+          <a:p>
+            <a:pPr algn="ctr"/>
+          </a:p>
+        </p:txBody>
+      </p:sp>
+      <p:sp>
+        <p:nvSpPr>
+          <p:cNvPr id="8" name="TextBox 7"/>
+          <p:cNvSpPr txBox="1"/>
+          <p:nvPr/>
+        </p:nvSpPr>
+        <p:spPr>
+          <a:xfrm>
+            <a:off x="640080" y="6455664"/>
+            <a:ext cx="8229600" cy="320040"/>
+          </a:xfrm>
+          <a:prstGeom prst="rect">
+            <a:avLst/>
+          </a:prstGeom>
+          <a:noFill/>
+        </p:spPr>
+        <p:txBody>
+          <a:bodyPr wrap="square">
+            <a:spAutoFit/>
+          </a:bodyPr>
+          <a:lstStyle/>
+          <a:p>
+            <a:pPr>
+              <a:spcAft>
+                <a:spcPts val="0"/>
+              </a:spcAft>
+            </a:pPr>
+            <a:r>
+              <a:rPr sz="900" b="0">
+                <a:solidFill>
+                  <a:srgbClr val="5C6357"/>
+                </a:solidFill>
+                <a:latin typeface="Calibri"/>
+              </a:rPr>
+              <a:t>Polyphenols · journal club</a:t>
+            </a:r>
+          </a:p>
+        </p:txBody>
+      </p:sp>
+      <p:sp>
+        <p:nvSpPr>
+          <p:cNvPr id="9" name="TextBox 8"/>
+          <p:cNvSpPr txBox="1"/>
+          <p:nvPr/>
+        </p:nvSpPr>
+        <p:spPr>
+          <a:xfrm>
+            <a:off x="10881360" y="6455664"/>
+            <a:ext cx="640080" cy="320040"/>
+          </a:xfrm>
+          <a:prstGeom prst="rect">
+            <a:avLst/>
+          </a:prstGeom>
+          <a:noFill/>
+        </p:spPr>
+        <p:txBody>
+          <a:bodyPr wrap="square">
+            <a:spAutoFit/>
+          </a:bodyPr>
+          <a:lstStyle/>
+          <a:p>
+            <a:pPr algn="r">
+              <a:spcAft>
+                <a:spcPts val="0"/>
+              </a:spcAft>
+            </a:pPr>
+            <a:r>
+              <a:rPr sz="900" b="0">
+                <a:solidFill>
+                  <a:srgbClr val="5C6357"/>
+                </a:solidFill>
+                <a:latin typeface="Calibri"/>
+              </a:rPr>
+              <a:t>8</a:t>
             </a:r>
           </a:p>
         </p:txBody>
@@ -5180,14 +7642,102 @@
       <p:grpSpPr/>
       <p:sp>
         <p:nvSpPr>
-          <p:cNvPr id="2" name="TextBox 1"/>
+          <p:cNvPr id="2" name="Rectangle 1"/>
+          <p:cNvSpPr/>
+          <p:nvPr/>
+        </p:nvSpPr>
+        <p:spPr>
+          <a:xfrm>
+            <a:off x="0" y="0"/>
+            <a:ext cx="12191695" cy="6858000"/>
+          </a:xfrm>
+          <a:prstGeom prst="rect">
+            <a:avLst/>
+          </a:prstGeom>
+          <a:solidFill>
+            <a:srgbClr val="FFFFFF"/>
+          </a:solidFill>
+          <a:ln>
+            <a:noFill/>
+          </a:ln>
+          <a:effectLst/>
+        </p:spPr>
+        <p:style>
+          <a:lnRef idx="1">
+            <a:schemeClr val="accent1"/>
+          </a:lnRef>
+          <a:fillRef idx="3">
+            <a:schemeClr val="accent1"/>
+          </a:fillRef>
+          <a:effectRef idx="2">
+            <a:schemeClr val="accent1"/>
+          </a:effectRef>
+          <a:fontRef idx="minor">
+            <a:schemeClr val="lt1"/>
+          </a:fontRef>
+        </p:style>
+        <p:txBody>
+          <a:bodyPr rtlCol="0" anchor="ctr"/>
+          <a:lstStyle/>
+          <a:p>
+            <a:pPr algn="ctr"/>
+          </a:p>
+        </p:txBody>
+      </p:sp>
+      <p:sp>
+        <p:nvSpPr>
+          <p:cNvPr id="3" name="Rectangle 2"/>
+          <p:cNvSpPr/>
+          <p:nvPr/>
+        </p:nvSpPr>
+        <p:spPr>
+          <a:xfrm>
+            <a:off x="0" y="0"/>
+            <a:ext cx="146304" cy="6858000"/>
+          </a:xfrm>
+          <a:prstGeom prst="rect">
+            <a:avLst/>
+          </a:prstGeom>
+          <a:solidFill>
+            <a:srgbClr val="3B5A40"/>
+          </a:solidFill>
+          <a:ln>
+            <a:noFill/>
+          </a:ln>
+          <a:effectLst/>
+        </p:spPr>
+        <p:style>
+          <a:lnRef idx="1">
+            <a:schemeClr val="accent1"/>
+          </a:lnRef>
+          <a:fillRef idx="3">
+            <a:schemeClr val="accent1"/>
+          </a:fillRef>
+          <a:effectRef idx="2">
+            <a:schemeClr val="accent1"/>
+          </a:effectRef>
+          <a:fontRef idx="minor">
+            <a:schemeClr val="lt1"/>
+          </a:fontRef>
+        </p:style>
+        <p:txBody>
+          <a:bodyPr rtlCol="0" anchor="ctr"/>
+          <a:lstStyle/>
+          <a:p>
+            <a:pPr algn="ctr"/>
+          </a:p>
+        </p:txBody>
+      </p:sp>
+      <p:sp>
+        <p:nvSpPr>
+          <p:cNvPr id="4" name="TextBox 3"/>
           <p:cNvSpPr txBox="1"/>
           <p:nvPr/>
         </p:nvSpPr>
         <p:spPr>
           <a:xfrm>
-            <a:off x="548640" y="365760"/>
-            <a:ext cx="11064240" cy="914400"/>
+            <a:off x="640080" y="384048"/>
+            <a:ext cx="10881360" cy="822960"/>
           </a:xfrm>
           <a:prstGeom prst="rect">
             <a:avLst/>
@@ -5200,12 +7750,17 @@
           </a:bodyPr>
           <a:lstStyle/>
           <a:p>
-            <a:pPr/>
-            <a:r>
-              <a:rPr sz="3000" b="1">
+            <a:pPr>
+              <a:spcAft>
+                <a:spcPts val="600"/>
+              </a:spcAft>
+            </a:pPr>
+            <a:r>
+              <a:rPr sz="2600" b="1">
                 <a:solidFill>
-                  <a:srgbClr val="2F5D62"/>
+                  <a:srgbClr val="3B5A40"/>
                 </a:solidFill>
+                <a:latin typeface="Georgia"/>
               </a:rPr>
               <a:t>Reference</a:t>
             </a:r>
@@ -5214,14 +7769,58 @@
       </p:sp>
       <p:sp>
         <p:nvSpPr>
-          <p:cNvPr id="3" name="TextBox 2"/>
+          <p:cNvPr id="5" name="Rectangle 4"/>
+          <p:cNvSpPr/>
+          <p:nvPr/>
+        </p:nvSpPr>
+        <p:spPr>
+          <a:xfrm>
+            <a:off x="658368" y="1170432"/>
+            <a:ext cx="2011680" cy="27940"/>
+          </a:xfrm>
+          <a:prstGeom prst="rect">
+            <a:avLst/>
+          </a:prstGeom>
+          <a:solidFill>
+            <a:srgbClr val="7D9D74"/>
+          </a:solidFill>
+          <a:ln>
+            <a:noFill/>
+          </a:ln>
+          <a:effectLst/>
+        </p:spPr>
+        <p:style>
+          <a:lnRef idx="1">
+            <a:schemeClr val="accent1"/>
+          </a:lnRef>
+          <a:fillRef idx="3">
+            <a:schemeClr val="accent1"/>
+          </a:fillRef>
+          <a:effectRef idx="2">
+            <a:schemeClr val="accent1"/>
+          </a:effectRef>
+          <a:fontRef idx="minor">
+            <a:schemeClr val="lt1"/>
+          </a:fontRef>
+        </p:style>
+        <p:txBody>
+          <a:bodyPr rtlCol="0" anchor="ctr"/>
+          <a:lstStyle/>
+          <a:p>
+            <a:pPr algn="ctr"/>
+          </a:p>
+        </p:txBody>
+      </p:sp>
+      <p:sp>
+        <p:nvSpPr>
+          <p:cNvPr id="6" name="TextBox 5"/>
           <p:cNvSpPr txBox="1"/>
           <p:nvPr/>
         </p:nvSpPr>
         <p:spPr>
           <a:xfrm>
-            <a:off x="640080" y="1463040"/>
-            <a:ext cx="10881360" cy="4937760"/>
+            <a:off x="731520" y="1463040"/>
+            <a:ext cx="10789920" cy="4754880"/>
           </a:xfrm>
           <a:prstGeom prst="rect">
             <a:avLst/>
@@ -5234,14 +7833,141 @@
           </a:bodyPr>
           <a:lstStyle/>
           <a:p>
-            <a:pPr/>
+            <a:pPr>
+              <a:spcAft>
+                <a:spcPts val="800"/>
+              </a:spcAft>
+            </a:pPr>
             <a:r>
               <a:rPr sz="1500" b="0">
                 <a:solidFill>
-                  <a:srgbClr val="1A1A1A"/>
+                  <a:srgbClr val="20261F"/>
                 </a:solidFill>
+                <a:latin typeface="Calibri"/>
               </a:rPr>
               <a:t>Rossi L., Rocchetti G., Lucini L., Rebecchi A. (2025). Antimicrobial Potential of Polyphenols: Mechanisms of Action and Microbial Responses — A Narrative Review. Antioxidants 14(2):200. https://doi.org/10.3390/antiox14020200 (CC-BY).</a:t>
+            </a:r>
+          </a:p>
+        </p:txBody>
+      </p:sp>
+      <p:sp>
+        <p:nvSpPr>
+          <p:cNvPr id="7" name="Rectangle 6"/>
+          <p:cNvSpPr/>
+          <p:nvPr/>
+        </p:nvSpPr>
+        <p:spPr>
+          <a:xfrm>
+            <a:off x="640080" y="6419088"/>
+            <a:ext cx="10908792" cy="11430"/>
+          </a:xfrm>
+          <a:prstGeom prst="rect">
+            <a:avLst/>
+          </a:prstGeom>
+          <a:solidFill>
+            <a:srgbClr val="EEF1EC"/>
+          </a:solidFill>
+          <a:ln>
+            <a:noFill/>
+          </a:ln>
+          <a:effectLst/>
+        </p:spPr>
+        <p:style>
+          <a:lnRef idx="1">
+            <a:schemeClr val="accent1"/>
+          </a:lnRef>
+          <a:fillRef idx="3">
+            <a:schemeClr val="accent1"/>
+          </a:fillRef>
+          <a:effectRef idx="2">
+            <a:schemeClr val="accent1"/>
+          </a:effectRef>
+          <a:fontRef idx="minor">
+            <a:schemeClr val="lt1"/>
+          </a:fontRef>
+        </p:style>
+        <p:txBody>
+          <a:bodyPr rtlCol="0" anchor="ctr"/>
+          <a:lstStyle/>
+          <a:p>
+            <a:pPr algn="ctr"/>
+          </a:p>
+        </p:txBody>
+      </p:sp>
+      <p:sp>
+        <p:nvSpPr>
+          <p:cNvPr id="8" name="TextBox 7"/>
+          <p:cNvSpPr txBox="1"/>
+          <p:nvPr/>
+        </p:nvSpPr>
+        <p:spPr>
+          <a:xfrm>
+            <a:off x="640080" y="6455664"/>
+            <a:ext cx="8229600" cy="320040"/>
+          </a:xfrm>
+          <a:prstGeom prst="rect">
+            <a:avLst/>
+          </a:prstGeom>
+          <a:noFill/>
+        </p:spPr>
+        <p:txBody>
+          <a:bodyPr wrap="square">
+            <a:spAutoFit/>
+          </a:bodyPr>
+          <a:lstStyle/>
+          <a:p>
+            <a:pPr>
+              <a:spcAft>
+                <a:spcPts val="0"/>
+              </a:spcAft>
+            </a:pPr>
+            <a:r>
+              <a:rPr sz="900" b="0">
+                <a:solidFill>
+                  <a:srgbClr val="5C6357"/>
+                </a:solidFill>
+                <a:latin typeface="Calibri"/>
+              </a:rPr>
+              <a:t>Polyphenols · journal club</a:t>
+            </a:r>
+          </a:p>
+        </p:txBody>
+      </p:sp>
+      <p:sp>
+        <p:nvSpPr>
+          <p:cNvPr id="9" name="TextBox 8"/>
+          <p:cNvSpPr txBox="1"/>
+          <p:nvPr/>
+        </p:nvSpPr>
+        <p:spPr>
+          <a:xfrm>
+            <a:off x="10881360" y="6455664"/>
+            <a:ext cx="640080" cy="320040"/>
+          </a:xfrm>
+          <a:prstGeom prst="rect">
+            <a:avLst/>
+          </a:prstGeom>
+          <a:noFill/>
+        </p:spPr>
+        <p:txBody>
+          <a:bodyPr wrap="square">
+            <a:spAutoFit/>
+          </a:bodyPr>
+          <a:lstStyle/>
+          <a:p>
+            <a:pPr algn="r">
+              <a:spcAft>
+                <a:spcPts val="0"/>
+              </a:spcAft>
+            </a:pPr>
+            <a:r>
+              <a:rPr sz="900" b="0">
+                <a:solidFill>
+                  <a:srgbClr val="5C6357"/>
+                </a:solidFill>
+                <a:latin typeface="Calibri"/>
+              </a:rPr>
+              <a:t>9</a:t>
             </a:r>
           </a:p>
         </p:txBody>
